--- a/실습5/실습5_deconvolution_발표.pptx
+++ b/실습5/실습5_deconvolution_발표.pptx
@@ -14,6 +14,8 @@
     <p:sldId id="262" r:id="rId13"/>
     <p:sldId id="263" r:id="rId14"/>
     <p:sldId id="264" r:id="rId15"/>
+    <p:sldId id="265" r:id="rId16"/>
+    <p:sldId id="266" r:id="rId17"/>
   </p:sldIdLst>
   <p:sldSz cx="12191695" cy="6858000" type="screen4x3"/>
   <p:notesSz cx="6858000" cy="9144000"/>
@@ -3642,6 +3644,1541 @@
 </p:sld>
 </file>
 
+<file path=ppt/slides/slide10.xml><?xml version="1.0" encoding="utf-8"?>
+<p:sld xmlns:a="http://schemas.openxmlformats.org/drawingml/2006/main" xmlns:p="http://schemas.openxmlformats.org/presentationml/2006/main" xmlns:r="http://schemas.openxmlformats.org/officeDocument/2006/relationships">
+  <p:cSld>
+    <p:bg>
+      <p:bgPr>
+        <a:solidFill>
+          <a:srgbClr val="FFFFFF"/>
+        </a:solidFill>
+        <a:effectLst/>
+      </p:bgPr>
+    </p:bg>
+    <p:spTree>
+      <p:nvGrpSpPr>
+        <p:cNvPr id="1" name=""/>
+        <p:cNvGrpSpPr/>
+        <p:nvPr/>
+      </p:nvGrpSpPr>
+      <p:grpSpPr/>
+      <p:sp>
+        <p:nvSpPr>
+          <p:cNvPr id="2" name="TextBox 1"/>
+          <p:cNvSpPr txBox="1"/>
+          <p:nvPr/>
+        </p:nvSpPr>
+        <p:spPr>
+          <a:xfrm>
+            <a:off x="640080" y="420624"/>
+            <a:ext cx="10972800" cy="274320"/>
+          </a:xfrm>
+          <a:prstGeom prst="rect">
+            <a:avLst/>
+          </a:prstGeom>
+          <a:noFill/>
+        </p:spPr>
+        <p:txBody>
+          <a:bodyPr wrap="square" anchor="t">
+            <a:spAutoFit/>
+          </a:bodyPr>
+          <a:lstStyle/>
+          <a:p>
+            <a:pPr algn="l">
+              <a:lnSpc>
+                <a:spcPct val="125000"/>
+              </a:lnSpc>
+            </a:pPr>
+            <a:r>
+              <a:rPr sz="1100" b="1">
+                <a:solidFill>
+                  <a:srgbClr val="0B6E5E"/>
+                </a:solidFill>
+                <a:latin typeface="Consolas"/>
+              </a:rPr>
+              <a:t>4 · KERNEL DIRECTION</a:t>
+            </a:r>
+          </a:p>
+        </p:txBody>
+      </p:sp>
+      <p:sp>
+        <p:nvSpPr>
+          <p:cNvPr id="3" name="TextBox 2"/>
+          <p:cNvSpPr txBox="1"/>
+          <p:nvPr/>
+        </p:nvSpPr>
+        <p:spPr>
+          <a:xfrm>
+            <a:off x="640080" y="713232"/>
+            <a:ext cx="10972800" cy="548640"/>
+          </a:xfrm>
+          <a:prstGeom prst="rect">
+            <a:avLst/>
+          </a:prstGeom>
+          <a:noFill/>
+        </p:spPr>
+        <p:txBody>
+          <a:bodyPr wrap="square" anchor="t">
+            <a:spAutoFit/>
+          </a:bodyPr>
+          <a:lstStyle/>
+          <a:p>
+            <a:pPr algn="l">
+              <a:lnSpc>
+                <a:spcPct val="125000"/>
+              </a:lnSpc>
+            </a:pPr>
+            <a:r>
+              <a:rPr sz="3000" b="1">
+                <a:solidFill>
+                  <a:srgbClr val="131A19"/>
+                </a:solidFill>
+                <a:latin typeface="맑은 고딕"/>
+              </a:rPr>
+              <a:t>test_deconv_multi — 커널 방향이 이미지마다 다르다</a:t>
+            </a:r>
+          </a:p>
+        </p:txBody>
+      </p:sp>
+      <p:sp>
+        <p:nvSpPr>
+          <p:cNvPr id="4" name="TextBox 3"/>
+          <p:cNvSpPr txBox="1"/>
+          <p:nvPr/>
+        </p:nvSpPr>
+        <p:spPr>
+          <a:xfrm>
+            <a:off x="640080" y="1371600"/>
+            <a:ext cx="10972800" cy="365760"/>
+          </a:xfrm>
+          <a:prstGeom prst="rect">
+            <a:avLst/>
+          </a:prstGeom>
+          <a:noFill/>
+        </p:spPr>
+        <p:txBody>
+          <a:bodyPr wrap="square" anchor="t">
+            <a:spAutoFit/>
+          </a:bodyPr>
+          <a:lstStyle/>
+          <a:p>
+            <a:pPr algn="l">
+              <a:lnSpc>
+                <a:spcPct val="125000"/>
+              </a:lnSpc>
+            </a:pPr>
+            <a:r>
+              <a:rPr sz="1400" b="0">
+                <a:solidFill>
+                  <a:srgbClr val="66756F"/>
+                </a:solidFill>
+                <a:latin typeface="맑은 고딕"/>
+              </a:rPr>
+              <a:t>0° / 45° / 90° / 135° 각 25장. 폴더끼리 이미지가 겹치지 않는다 (COSMOS 가 아니다)</a:t>
+            </a:r>
+          </a:p>
+        </p:txBody>
+      </p:sp>
+      <p:sp>
+        <p:nvSpPr>
+          <p:cNvPr id="5" name="Rectangle 4"/>
+          <p:cNvSpPr/>
+          <p:nvPr/>
+        </p:nvSpPr>
+        <p:spPr>
+          <a:xfrm>
+            <a:off x="640080" y="1874520"/>
+            <a:ext cx="10908792" cy="15240"/>
+          </a:xfrm>
+          <a:prstGeom prst="rect">
+            <a:avLst/>
+          </a:prstGeom>
+          <a:solidFill>
+            <a:srgbClr val="DCE3E0"/>
+          </a:solidFill>
+          <a:ln>
+            <a:noFill/>
+          </a:ln>
+          <a:effectLst/>
+        </p:spPr>
+        <p:style>
+          <a:lnRef idx="1">
+            <a:schemeClr val="accent1"/>
+          </a:lnRef>
+          <a:fillRef idx="3">
+            <a:schemeClr val="accent1"/>
+          </a:fillRef>
+          <a:effectRef idx="2">
+            <a:schemeClr val="accent1"/>
+          </a:effectRef>
+          <a:fontRef idx="minor">
+            <a:schemeClr val="lt1"/>
+          </a:fontRef>
+        </p:style>
+        <p:txBody>
+          <a:bodyPr rtlCol="0" anchor="ctr"/>
+          <a:lstStyle/>
+          <a:p>
+            <a:pPr algn="ctr"/>
+          </a:p>
+        </p:txBody>
+      </p:sp>
+      <p:graphicFrame>
+        <p:nvGraphicFramePr>
+          <p:cNvPr id="6" name="Table 5"/>
+          <p:cNvGraphicFramePr>
+            <a:graphicFrameLocks noGrp="1"/>
+          </p:cNvGraphicFramePr>
+          <p:nvPr/>
+        </p:nvGraphicFramePr>
+        <p:xfrm>
+          <a:off x="640080" y="2148840"/>
+          <a:ext cx="6035040" cy="1097280"/>
+        </p:xfrm>
+        <a:graphic>
+          <a:graphicData uri="http://schemas.openxmlformats.org/drawingml/2006/table">
+            <a:tbl>
+              <a:tblPr firstRow="1" bandRow="1">
+                <a:tableStyleId>{5C22544A-7EE6-4342-B048-85BDC9FD1C3A}</a:tableStyleId>
+              </a:tblPr>
+              <a:tblGrid>
+                <a:gridCol w="3291840"/>
+                <a:gridCol w="914400"/>
+                <a:gridCol w="914400"/>
+                <a:gridCol w="914400"/>
+              </a:tblGrid>
+              <a:tr h="274320">
+                <a:tc>
+                  <a:txBody>
+                    <a:bodyPr/>
+                    <a:lstStyle/>
+                    <a:p>
+                      <a:pPr algn="l"/>
+                      <a:r>
+                        <a:rPr sz="1200" b="1">
+                          <a:solidFill>
+                            <a:srgbClr val="131A19"/>
+                          </a:solidFill>
+                          <a:latin typeface="맑은 고딕"/>
+                        </a:rPr>
+                        <a:t>방향 정보</a:t>
+                      </a:r>
+                    </a:p>
+                  </a:txBody>
+                  <a:tcPr marL="82296" marR="82296" marT="27432" marB="27432" anchor="ctr">
+                    <a:solidFill>
+                      <a:srgbClr val="DCEDE8"/>
+                    </a:solidFill>
+                  </a:tcPr>
+                </a:tc>
+                <a:tc>
+                  <a:txBody>
+                    <a:bodyPr/>
+                    <a:lstStyle/>
+                    <a:p>
+                      <a:pPr algn="r"/>
+                      <a:r>
+                        <a:rPr sz="1200" b="1">
+                          <a:solidFill>
+                            <a:srgbClr val="131A19"/>
+                          </a:solidFill>
+                          <a:latin typeface="Consolas"/>
+                        </a:rPr>
+                        <a:t>K</a:t>
+                      </a:r>
+                    </a:p>
+                  </a:txBody>
+                  <a:tcPr marL="82296" marR="82296" marT="27432" marB="27432" anchor="ctr">
+                    <a:solidFill>
+                      <a:srgbClr val="DCEDE8"/>
+                    </a:solidFill>
+                  </a:tcPr>
+                </a:tc>
+                <a:tc>
+                  <a:txBody>
+                    <a:bodyPr/>
+                    <a:lstStyle/>
+                    <a:p>
+                      <a:pPr algn="r"/>
+                      <a:r>
+                        <a:rPr sz="1200" b="1">
+                          <a:solidFill>
+                            <a:srgbClr val="131A19"/>
+                          </a:solidFill>
+                          <a:latin typeface="Consolas"/>
+                        </a:rPr>
+                        <a:t>PSNR</a:t>
+                      </a:r>
+                    </a:p>
+                  </a:txBody>
+                  <a:tcPr marL="82296" marR="82296" marT="27432" marB="27432" anchor="ctr">
+                    <a:solidFill>
+                      <a:srgbClr val="DCEDE8"/>
+                    </a:solidFill>
+                  </a:tcPr>
+                </a:tc>
+                <a:tc>
+                  <a:txBody>
+                    <a:bodyPr/>
+                    <a:lstStyle/>
+                    <a:p>
+                      <a:pPr algn="r"/>
+                      <a:r>
+                        <a:rPr sz="1200" b="1">
+                          <a:solidFill>
+                            <a:srgbClr val="131A19"/>
+                          </a:solidFill>
+                          <a:latin typeface="Consolas"/>
+                        </a:rPr>
+                        <a:t>SSIM</a:t>
+                      </a:r>
+                    </a:p>
+                  </a:txBody>
+                  <a:tcPr marL="82296" marR="82296" marT="27432" marB="27432" anchor="ctr">
+                    <a:solidFill>
+                      <a:srgbClr val="DCEDE8"/>
+                    </a:solidFill>
+                  </a:tcPr>
+                </a:tc>
+              </a:tr>
+              <a:tr h="274320">
+                <a:tc>
+                  <a:txBody>
+                    <a:bodyPr/>
+                    <a:lstStyle/>
+                    <a:p>
+                      <a:pPr algn="l"/>
+                      <a:r>
+                        <a:rPr sz="1200" b="1">
+                          <a:solidFill>
+                            <a:srgbClr val="131A19"/>
+                          </a:solidFill>
+                          <a:latin typeface="맑은 고딕"/>
+                        </a:rPr>
+                        <a:t>메타데이터</a:t>
+                      </a:r>
+                    </a:p>
+                  </a:txBody>
+                  <a:tcPr marL="82296" marR="82296" marT="27432" marB="27432" anchor="ctr">
+                    <a:solidFill>
+                      <a:srgbClr val="ECF5F2"/>
+                    </a:solidFill>
+                  </a:tcPr>
+                </a:tc>
+                <a:tc>
+                  <a:txBody>
+                    <a:bodyPr/>
+                    <a:lstStyle/>
+                    <a:p>
+                      <a:pPr algn="r"/>
+                      <a:r>
+                        <a:rPr sz="1200" b="1">
+                          <a:solidFill>
+                            <a:srgbClr val="131A19"/>
+                          </a:solidFill>
+                          <a:latin typeface="Consolas"/>
+                        </a:rPr>
+                        <a:t>1e-6</a:t>
+                      </a:r>
+                    </a:p>
+                  </a:txBody>
+                  <a:tcPr marL="82296" marR="82296" marT="27432" marB="27432" anchor="ctr">
+                    <a:solidFill>
+                      <a:srgbClr val="ECF5F2"/>
+                    </a:solidFill>
+                  </a:tcPr>
+                </a:tc>
+                <a:tc>
+                  <a:txBody>
+                    <a:bodyPr/>
+                    <a:lstStyle/>
+                    <a:p>
+                      <a:pPr algn="r"/>
+                      <a:r>
+                        <a:rPr sz="1200" b="1">
+                          <a:solidFill>
+                            <a:srgbClr val="131A19"/>
+                          </a:solidFill>
+                          <a:latin typeface="Consolas"/>
+                        </a:rPr>
+                        <a:t>48.52</a:t>
+                      </a:r>
+                    </a:p>
+                  </a:txBody>
+                  <a:tcPr marL="82296" marR="82296" marT="27432" marB="27432" anchor="ctr">
+                    <a:solidFill>
+                      <a:srgbClr val="ECF5F2"/>
+                    </a:solidFill>
+                  </a:tcPr>
+                </a:tc>
+                <a:tc>
+                  <a:txBody>
+                    <a:bodyPr/>
+                    <a:lstStyle/>
+                    <a:p>
+                      <a:pPr algn="r"/>
+                      <a:r>
+                        <a:rPr sz="1200" b="1">
+                          <a:solidFill>
+                            <a:srgbClr val="131A19"/>
+                          </a:solidFill>
+                          <a:latin typeface="Consolas"/>
+                        </a:rPr>
+                        <a:t>0.9935</a:t>
+                      </a:r>
+                    </a:p>
+                  </a:txBody>
+                  <a:tcPr marL="82296" marR="82296" marT="27432" marB="27432" anchor="ctr">
+                    <a:solidFill>
+                      <a:srgbClr val="ECF5F2"/>
+                    </a:solidFill>
+                  </a:tcPr>
+                </a:tc>
+              </a:tr>
+              <a:tr h="274320">
+                <a:tc>
+                  <a:txBody>
+                    <a:bodyPr/>
+                    <a:lstStyle/>
+                    <a:p>
+                      <a:pPr algn="l"/>
+                      <a:r>
+                        <a:rPr sz="1200" b="0">
+                          <a:solidFill>
+                            <a:srgbClr val="3C4947"/>
+                          </a:solidFill>
+                          <a:latin typeface="맑은 고딕"/>
+                        </a:rPr>
+                        <a:t>측정치에서 추정 (평균 오차 0.19°)</a:t>
+                      </a:r>
+                    </a:p>
+                  </a:txBody>
+                  <a:tcPr marL="82296" marR="82296" marT="27432" marB="27432" anchor="ctr">
+                    <a:solidFill>
+                      <a:srgbClr val="FFFFFF"/>
+                    </a:solidFill>
+                  </a:tcPr>
+                </a:tc>
+                <a:tc>
+                  <a:txBody>
+                    <a:bodyPr/>
+                    <a:lstStyle/>
+                    <a:p>
+                      <a:pPr algn="r"/>
+                      <a:r>
+                        <a:rPr sz="1200" b="0">
+                          <a:solidFill>
+                            <a:srgbClr val="3C4947"/>
+                          </a:solidFill>
+                          <a:latin typeface="Consolas"/>
+                        </a:rPr>
+                        <a:t>1e-5</a:t>
+                      </a:r>
+                    </a:p>
+                  </a:txBody>
+                  <a:tcPr marL="82296" marR="82296" marT="27432" marB="27432" anchor="ctr">
+                    <a:solidFill>
+                      <a:srgbClr val="FFFFFF"/>
+                    </a:solidFill>
+                  </a:tcPr>
+                </a:tc>
+                <a:tc>
+                  <a:txBody>
+                    <a:bodyPr/>
+                    <a:lstStyle/>
+                    <a:p>
+                      <a:pPr algn="r"/>
+                      <a:r>
+                        <a:rPr sz="1200" b="0">
+                          <a:solidFill>
+                            <a:srgbClr val="3C4947"/>
+                          </a:solidFill>
+                          <a:latin typeface="Consolas"/>
+                        </a:rPr>
+                        <a:t>41.22</a:t>
+                      </a:r>
+                    </a:p>
+                  </a:txBody>
+                  <a:tcPr marL="82296" marR="82296" marT="27432" marB="27432" anchor="ctr">
+                    <a:solidFill>
+                      <a:srgbClr val="FFFFFF"/>
+                    </a:solidFill>
+                  </a:tcPr>
+                </a:tc>
+                <a:tc>
+                  <a:txBody>
+                    <a:bodyPr/>
+                    <a:lstStyle/>
+                    <a:p>
+                      <a:pPr algn="r"/>
+                      <a:r>
+                        <a:rPr sz="1200" b="0">
+                          <a:solidFill>
+                            <a:srgbClr val="3C4947"/>
+                          </a:solidFill>
+                          <a:latin typeface="Consolas"/>
+                        </a:rPr>
+                        <a:t>0.9838</a:t>
+                      </a:r>
+                    </a:p>
+                  </a:txBody>
+                  <a:tcPr marL="82296" marR="82296" marT="27432" marB="27432" anchor="ctr">
+                    <a:solidFill>
+                      <a:srgbClr val="FFFFFF"/>
+                    </a:solidFill>
+                  </a:tcPr>
+                </a:tc>
+              </a:tr>
+              <a:tr h="274320">
+                <a:tc>
+                  <a:txBody>
+                    <a:bodyPr/>
+                    <a:lstStyle/>
+                    <a:p>
+                      <a:pPr algn="l"/>
+                      <a:r>
+                        <a:rPr sz="1200" b="0">
+                          <a:solidFill>
+                            <a:srgbClr val="3C4947"/>
+                          </a:solidFill>
+                          <a:latin typeface="맑은 고딕"/>
+                        </a:rPr>
+                        <a:t>무시하고 0° 고정</a:t>
+                      </a:r>
+                    </a:p>
+                  </a:txBody>
+                  <a:tcPr marL="82296" marR="82296" marT="27432" marB="27432" anchor="ctr">
+                    <a:solidFill>
+                      <a:srgbClr val="FFFFFF"/>
+                    </a:solidFill>
+                  </a:tcPr>
+                </a:tc>
+                <a:tc>
+                  <a:txBody>
+                    <a:bodyPr/>
+                    <a:lstStyle/>
+                    <a:p>
+                      <a:pPr algn="r"/>
+                      <a:r>
+                        <a:rPr sz="1200" b="0">
+                          <a:solidFill>
+                            <a:srgbClr val="3C4947"/>
+                          </a:solidFill>
+                          <a:latin typeface="Consolas"/>
+                        </a:rPr>
+                        <a:t>1e-12</a:t>
+                      </a:r>
+                    </a:p>
+                  </a:txBody>
+                  <a:tcPr marL="82296" marR="82296" marT="27432" marB="27432" anchor="ctr">
+                    <a:solidFill>
+                      <a:srgbClr val="FFFFFF"/>
+                    </a:solidFill>
+                  </a:tcPr>
+                </a:tc>
+                <a:tc>
+                  <a:txBody>
+                    <a:bodyPr/>
+                    <a:lstStyle/>
+                    <a:p>
+                      <a:pPr algn="r"/>
+                      <a:r>
+                        <a:rPr sz="1200" b="0">
+                          <a:solidFill>
+                            <a:srgbClr val="3C4947"/>
+                          </a:solidFill>
+                          <a:latin typeface="Consolas"/>
+                        </a:rPr>
+                        <a:t>18.57</a:t>
+                      </a:r>
+                    </a:p>
+                  </a:txBody>
+                  <a:tcPr marL="82296" marR="82296" marT="27432" marB="27432" anchor="ctr">
+                    <a:solidFill>
+                      <a:srgbClr val="FFFFFF"/>
+                    </a:solidFill>
+                  </a:tcPr>
+                </a:tc>
+                <a:tc>
+                  <a:txBody>
+                    <a:bodyPr/>
+                    <a:lstStyle/>
+                    <a:p>
+                      <a:pPr algn="r"/>
+                      <a:r>
+                        <a:rPr sz="1200" b="0">
+                          <a:solidFill>
+                            <a:srgbClr val="3C4947"/>
+                          </a:solidFill>
+                          <a:latin typeface="Consolas"/>
+                        </a:rPr>
+                        <a:t>—</a:t>
+                      </a:r>
+                    </a:p>
+                  </a:txBody>
+                  <a:tcPr marL="82296" marR="82296" marT="27432" marB="27432" anchor="ctr">
+                    <a:solidFill>
+                      <a:srgbClr val="FFFFFF"/>
+                    </a:solidFill>
+                  </a:tcPr>
+                </a:tc>
+              </a:tr>
+            </a:tbl>
+          </a:graphicData>
+        </a:graphic>
+      </p:graphicFrame>
+      <p:sp>
+        <p:nvSpPr>
+          <p:cNvPr id="7" name="TextBox 6"/>
+          <p:cNvSpPr txBox="1"/>
+          <p:nvPr/>
+        </p:nvSpPr>
+        <p:spPr>
+          <a:xfrm>
+            <a:off x="7040880" y="2103120"/>
+            <a:ext cx="4480560" cy="1828800"/>
+          </a:xfrm>
+          <a:prstGeom prst="rect">
+            <a:avLst/>
+          </a:prstGeom>
+          <a:noFill/>
+        </p:spPr>
+        <p:txBody>
+          <a:bodyPr wrap="square" anchor="t">
+            <a:spAutoFit/>
+          </a:bodyPr>
+          <a:lstStyle/>
+          <a:p>
+            <a:pPr algn="l">
+              <a:lnSpc>
+                <a:spcPct val="125000"/>
+              </a:lnSpc>
+            </a:pPr>
+            <a:r>
+              <a:rPr sz="1400" b="1">
+                <a:solidFill>
+                  <a:srgbClr val="131A19"/>
+                </a:solidFill>
+                <a:latin typeface="맑은 고딕"/>
+              </a:rPr>
+              <a:t>방향은 측정치에서 알아낼 수 있다</a:t>
+            </a:r>
+          </a:p>
+          <a:p>
+            <a:pPr algn="l">
+              <a:lnSpc>
+                <a:spcPct val="125000"/>
+              </a:lnSpc>
+              <a:spcBef>
+                <a:spcPts val="600"/>
+              </a:spcBef>
+            </a:pPr>
+            <a:r>
+              <a:rPr sz="1200" b="0">
+                <a:solidFill>
+                  <a:srgbClr val="3C4947"/>
+                </a:solidFill>
+                <a:latin typeface="맑은 고딕"/>
+              </a:rPr>
+              <a:t>G = D·F 이므로 |D|≈0 인 magic-angle cone 에는 에너지가 없다. 스펙트럼에서 비어 있는 방향을 찾으면 된다. 메타데이터가 필요 없다.</a:t>
+            </a:r>
+          </a:p>
+        </p:txBody>
+      </p:sp>
+      <p:sp>
+        <p:nvSpPr>
+          <p:cNvPr id="8" name="Rounded Rectangle 7"/>
+          <p:cNvSpPr/>
+          <p:nvPr/>
+        </p:nvSpPr>
+        <p:spPr>
+          <a:xfrm>
+            <a:off x="640080" y="3749040"/>
+            <a:ext cx="10881360" cy="2194560"/>
+          </a:xfrm>
+          <a:prstGeom prst="roundRect">
+            <a:avLst>
+              <a:gd name="adj" fmla="val 4000"/>
+            </a:avLst>
+          </a:prstGeom>
+          <a:solidFill>
+            <a:srgbClr val="DCEDE8"/>
+          </a:solidFill>
+          <a:ln w="9525">
+            <a:solidFill>
+              <a:srgbClr val="0B6E5E"/>
+            </a:solidFill>
+          </a:ln>
+          <a:effectLst/>
+        </p:spPr>
+        <p:style>
+          <a:lnRef idx="1">
+            <a:schemeClr val="accent1"/>
+          </a:lnRef>
+          <a:fillRef idx="3">
+            <a:schemeClr val="accent1"/>
+          </a:fillRef>
+          <a:effectRef idx="2">
+            <a:schemeClr val="accent1"/>
+          </a:effectRef>
+          <a:fontRef idx="minor">
+            <a:schemeClr val="lt1"/>
+          </a:fontRef>
+        </p:style>
+        <p:txBody>
+          <a:bodyPr rtlCol="0" anchor="ctr"/>
+          <a:lstStyle/>
+          <a:p>
+            <a:pPr algn="ctr"/>
+          </a:p>
+        </p:txBody>
+      </p:sp>
+      <p:sp>
+        <p:nvSpPr>
+          <p:cNvPr id="9" name="TextBox 8"/>
+          <p:cNvSpPr txBox="1"/>
+          <p:nvPr/>
+        </p:nvSpPr>
+        <p:spPr>
+          <a:xfrm>
+            <a:off x="868680" y="3913632"/>
+            <a:ext cx="10424160" cy="1920240"/>
+          </a:xfrm>
+          <a:prstGeom prst="rect">
+            <a:avLst/>
+          </a:prstGeom>
+          <a:noFill/>
+        </p:spPr>
+        <p:txBody>
+          <a:bodyPr wrap="square" anchor="t">
+            <a:spAutoFit/>
+          </a:bodyPr>
+          <a:lstStyle/>
+          <a:p>
+            <a:pPr algn="l">
+              <a:lnSpc>
+                <a:spcPct val="125000"/>
+              </a:lnSpc>
+            </a:pPr>
+            <a:r>
+              <a:rPr sz="1500" b="1">
+                <a:solidFill>
+                  <a:srgbClr val="131A19"/>
+                </a:solidFill>
+                <a:latin typeface="맑은 고딕"/>
+              </a:rPr>
+              <a:t>K 는 모델이 현실과 어긋난 만큼을 흡수한다</a:t>
+            </a:r>
+          </a:p>
+          <a:p>
+            <a:pPr algn="l">
+              <a:lnSpc>
+                <a:spcPct val="125000"/>
+              </a:lnSpc>
+              <a:spcBef>
+                <a:spcPts val="600"/>
+              </a:spcBef>
+            </a:pPr>
+            <a:r>
+              <a:rPr sz="1250" b="0">
+                <a:solidFill>
+                  <a:srgbClr val="3C4947"/>
+                </a:solidFill>
+                <a:latin typeface="맑은 고딕"/>
+              </a:rPr>
+              <a:t>불확실성이 클수록 최적 K 가 커진다. 방향을 정확히 알면 1e-12, 추정하면 1e-5 다. 노이즈가 늘 때 K 가 커지는 것과 같은 구조다.</a:t>
+            </a:r>
+          </a:p>
+          <a:p>
+            <a:pPr algn="l">
+              <a:lnSpc>
+                <a:spcPct val="125000"/>
+              </a:lnSpc>
+              <a:spcBef>
+                <a:spcPts val="800"/>
+              </a:spcBef>
+            </a:pPr>
+            <a:r>
+              <a:rPr sz="1200" b="0">
+                <a:solidFill>
+                  <a:srgbClr val="3C4947"/>
+                </a:solidFill>
+                <a:latin typeface="Consolas"/>
+              </a:rPr>
+              <a:t>방향 오차에 대한 취약성:   0.01° 오차 → K=1e-12 는 107 dB 가 54 dB 로,  K=1e-6 은 54.7 → 54.1</a:t>
+            </a:r>
+          </a:p>
+          <a:p>
+            <a:pPr algn="l">
+              <a:lnSpc>
+                <a:spcPct val="125000"/>
+              </a:lnSpc>
+              <a:spcBef>
+                <a:spcPts val="600"/>
+              </a:spcBef>
+            </a:pPr>
+            <a:r>
+              <a:rPr sz="1250" b="0">
+                <a:solidFill>
+                  <a:srgbClr val="3C4947"/>
+                </a:solidFill>
+                <a:latin typeface="맑은 고딕"/>
+              </a:rPr>
+              <a:t>최소 K 가 항상 정답인 게 아니다. 방향을 무시하면 45°/90°/135° 에서 −11 ~ −13 dB 로 흐린 입력(7.89)보다도 나쁘다.</a:t>
+            </a:r>
+          </a:p>
+        </p:txBody>
+      </p:sp>
+    </p:spTree>
+  </p:cSld>
+  <p:clrMapOvr>
+    <a:masterClrMapping/>
+  </p:clrMapOvr>
+</p:sld>
+</file>
+
+<file path=ppt/slides/slide11.xml><?xml version="1.0" encoding="utf-8"?>
+<p:sld xmlns:a="http://schemas.openxmlformats.org/drawingml/2006/main" xmlns:p="http://schemas.openxmlformats.org/presentationml/2006/main" xmlns:r="http://schemas.openxmlformats.org/officeDocument/2006/relationships">
+  <p:cSld>
+    <p:bg>
+      <p:bgPr>
+        <a:solidFill>
+          <a:srgbClr val="FFFFFF"/>
+        </a:solidFill>
+        <a:effectLst/>
+      </p:bgPr>
+    </p:bg>
+    <p:spTree>
+      <p:nvGrpSpPr>
+        <p:cNvPr id="1" name=""/>
+        <p:cNvGrpSpPr/>
+        <p:nvPr/>
+      </p:nvGrpSpPr>
+      <p:grpSpPr/>
+      <p:sp>
+        <p:nvSpPr>
+          <p:cNvPr id="2" name="TextBox 1"/>
+          <p:cNvSpPr txBox="1"/>
+          <p:nvPr/>
+        </p:nvSpPr>
+        <p:spPr>
+          <a:xfrm>
+            <a:off x="640080" y="420624"/>
+            <a:ext cx="10972800" cy="274320"/>
+          </a:xfrm>
+          <a:prstGeom prst="rect">
+            <a:avLst/>
+          </a:prstGeom>
+          <a:noFill/>
+        </p:spPr>
+        <p:txBody>
+          <a:bodyPr wrap="square" anchor="t">
+            <a:spAutoFit/>
+          </a:bodyPr>
+          <a:lstStyle/>
+          <a:p>
+            <a:pPr algn="l">
+              <a:lnSpc>
+                <a:spcPct val="125000"/>
+              </a:lnSpc>
+            </a:pPr>
+            <a:r>
+              <a:rPr sz="1100" b="1">
+                <a:solidFill>
+                  <a:srgbClr val="0B6E5E"/>
+                </a:solidFill>
+                <a:latin typeface="Consolas"/>
+              </a:rPr>
+              <a:t>SUMMARY</a:t>
+            </a:r>
+          </a:p>
+        </p:txBody>
+      </p:sp>
+      <p:sp>
+        <p:nvSpPr>
+          <p:cNvPr id="3" name="TextBox 2"/>
+          <p:cNvSpPr txBox="1"/>
+          <p:nvPr/>
+        </p:nvSpPr>
+        <p:spPr>
+          <a:xfrm>
+            <a:off x="640080" y="713232"/>
+            <a:ext cx="10972800" cy="548640"/>
+          </a:xfrm>
+          <a:prstGeom prst="rect">
+            <a:avLst/>
+          </a:prstGeom>
+          <a:noFill/>
+        </p:spPr>
+        <p:txBody>
+          <a:bodyPr wrap="square" anchor="t">
+            <a:spAutoFit/>
+          </a:bodyPr>
+          <a:lstStyle/>
+          <a:p>
+            <a:pPr algn="l">
+              <a:lnSpc>
+                <a:spcPct val="125000"/>
+              </a:lnSpc>
+            </a:pPr>
+            <a:r>
+              <a:rPr sz="3000" b="1">
+                <a:solidFill>
+                  <a:srgbClr val="131A19"/>
+                </a:solidFill>
+                <a:latin typeface="맑은 고딕"/>
+              </a:rPr>
+              <a:t>정리</a:t>
+            </a:r>
+          </a:p>
+        </p:txBody>
+      </p:sp>
+      <p:sp>
+        <p:nvSpPr>
+          <p:cNvPr id="4" name="Rectangle 3"/>
+          <p:cNvSpPr/>
+          <p:nvPr/>
+        </p:nvSpPr>
+        <p:spPr>
+          <a:xfrm>
+            <a:off x="640080" y="1417320"/>
+            <a:ext cx="10908792" cy="15240"/>
+          </a:xfrm>
+          <a:prstGeom prst="rect">
+            <a:avLst/>
+          </a:prstGeom>
+          <a:solidFill>
+            <a:srgbClr val="DCE3E0"/>
+          </a:solidFill>
+          <a:ln>
+            <a:noFill/>
+          </a:ln>
+          <a:effectLst/>
+        </p:spPr>
+        <p:style>
+          <a:lnRef idx="1">
+            <a:schemeClr val="accent1"/>
+          </a:lnRef>
+          <a:fillRef idx="3">
+            <a:schemeClr val="accent1"/>
+          </a:fillRef>
+          <a:effectRef idx="2">
+            <a:schemeClr val="accent1"/>
+          </a:effectRef>
+          <a:fontRef idx="minor">
+            <a:schemeClr val="lt1"/>
+          </a:fontRef>
+        </p:style>
+        <p:txBody>
+          <a:bodyPr rtlCol="0" anchor="ctr"/>
+          <a:lstStyle/>
+          <a:p>
+            <a:pPr algn="ctr"/>
+          </a:p>
+        </p:txBody>
+      </p:sp>
+      <p:sp>
+        <p:nvSpPr>
+          <p:cNvPr id="5" name="Oval 4"/>
+          <p:cNvSpPr/>
+          <p:nvPr/>
+        </p:nvSpPr>
+        <p:spPr>
+          <a:xfrm>
+            <a:off x="685800" y="1810512"/>
+            <a:ext cx="310896" cy="310896"/>
+          </a:xfrm>
+          <a:prstGeom prst="ellipse">
+            <a:avLst/>
+          </a:prstGeom>
+          <a:solidFill>
+            <a:srgbClr val="0B6E5E"/>
+          </a:solidFill>
+          <a:ln>
+            <a:noFill/>
+          </a:ln>
+          <a:effectLst/>
+        </p:spPr>
+        <p:style>
+          <a:lnRef idx="1">
+            <a:schemeClr val="accent1"/>
+          </a:lnRef>
+          <a:fillRef idx="3">
+            <a:schemeClr val="accent1"/>
+          </a:fillRef>
+          <a:effectRef idx="2">
+            <a:schemeClr val="accent1"/>
+          </a:effectRef>
+          <a:fontRef idx="minor">
+            <a:schemeClr val="lt1"/>
+          </a:fontRef>
+        </p:style>
+        <p:txBody>
+          <a:bodyPr rtlCol="0" anchor="ctr"/>
+          <a:lstStyle/>
+          <a:p>
+            <a:pPr algn="ctr"/>
+            <a:r>
+              <a:rPr sz="1200" b="1">
+                <a:solidFill>
+                  <a:srgbClr val="FFFFFF"/>
+                </a:solidFill>
+                <a:latin typeface="Consolas"/>
+              </a:rPr>
+              <a:t>1</a:t>
+            </a:r>
+          </a:p>
+        </p:txBody>
+      </p:sp>
+      <p:sp>
+        <p:nvSpPr>
+          <p:cNvPr id="6" name="TextBox 5"/>
+          <p:cNvSpPr txBox="1"/>
+          <p:nvPr/>
+        </p:nvSpPr>
+        <p:spPr>
+          <a:xfrm>
+            <a:off x="1188720" y="1737360"/>
+            <a:ext cx="10241280" cy="822960"/>
+          </a:xfrm>
+          <a:prstGeom prst="rect">
+            <a:avLst/>
+          </a:prstGeom>
+          <a:noFill/>
+        </p:spPr>
+        <p:txBody>
+          <a:bodyPr wrap="square" anchor="t">
+            <a:spAutoFit/>
+          </a:bodyPr>
+          <a:lstStyle/>
+          <a:p>
+            <a:pPr algn="l">
+              <a:lnSpc>
+                <a:spcPct val="125000"/>
+              </a:lnSpc>
+            </a:pPr>
+            <a:r>
+              <a:rPr sz="1500" b="1">
+                <a:solidFill>
+                  <a:srgbClr val="131A19"/>
+                </a:solidFill>
+                <a:latin typeface="맑은 고딕"/>
+              </a:rPr>
+              <a:t>문제의 성격이 승자를 정한다</a:t>
+            </a:r>
+          </a:p>
+          <a:p>
+            <a:pPr algn="l">
+              <a:lnSpc>
+                <a:spcPct val="125000"/>
+              </a:lnSpc>
+              <a:spcBef>
+                <a:spcPts val="300"/>
+              </a:spcBef>
+            </a:pPr>
+            <a:r>
+              <a:rPr sz="1200" b="0">
+                <a:solidFill>
+                  <a:srgbClr val="66756F"/>
+                </a:solidFill>
+                <a:latin typeface="맑은 고딕"/>
+              </a:rPr>
+              <a:t>1일차는 노이즈라 역산이 불가능해 학습이 필요했고, 2일차는 노이즈가 없어 역산이 가능하니 학습이 불필요했다. 점수가 높은 건 잘해서가 아니라 문제가 쉬워서다.</a:t>
+            </a:r>
+          </a:p>
+        </p:txBody>
+      </p:sp>
+      <p:sp>
+        <p:nvSpPr>
+          <p:cNvPr id="7" name="Oval 6"/>
+          <p:cNvSpPr/>
+          <p:nvPr/>
+        </p:nvSpPr>
+        <p:spPr>
+          <a:xfrm>
+            <a:off x="685800" y="2743200"/>
+            <a:ext cx="310896" cy="310896"/>
+          </a:xfrm>
+          <a:prstGeom prst="ellipse">
+            <a:avLst/>
+          </a:prstGeom>
+          <a:solidFill>
+            <a:srgbClr val="0B6E5E"/>
+          </a:solidFill>
+          <a:ln>
+            <a:noFill/>
+          </a:ln>
+          <a:effectLst/>
+        </p:spPr>
+        <p:style>
+          <a:lnRef idx="1">
+            <a:schemeClr val="accent1"/>
+          </a:lnRef>
+          <a:fillRef idx="3">
+            <a:schemeClr val="accent1"/>
+          </a:fillRef>
+          <a:effectRef idx="2">
+            <a:schemeClr val="accent1"/>
+          </a:effectRef>
+          <a:fontRef idx="minor">
+            <a:schemeClr val="lt1"/>
+          </a:fontRef>
+        </p:style>
+        <p:txBody>
+          <a:bodyPr rtlCol="0" anchor="ctr"/>
+          <a:lstStyle/>
+          <a:p>
+            <a:pPr algn="ctr"/>
+            <a:r>
+              <a:rPr sz="1200" b="1">
+                <a:solidFill>
+                  <a:srgbClr val="FFFFFF"/>
+                </a:solidFill>
+                <a:latin typeface="Consolas"/>
+              </a:rPr>
+              <a:t>2</a:t>
+            </a:r>
+          </a:p>
+        </p:txBody>
+      </p:sp>
+      <p:sp>
+        <p:nvSpPr>
+          <p:cNvPr id="8" name="TextBox 7"/>
+          <p:cNvSpPr txBox="1"/>
+          <p:nvPr/>
+        </p:nvSpPr>
+        <p:spPr>
+          <a:xfrm>
+            <a:off x="1188720" y="2670048"/>
+            <a:ext cx="10241280" cy="822960"/>
+          </a:xfrm>
+          <a:prstGeom prst="rect">
+            <a:avLst/>
+          </a:prstGeom>
+          <a:noFill/>
+        </p:spPr>
+        <p:txBody>
+          <a:bodyPr wrap="square" anchor="t">
+            <a:spAutoFit/>
+          </a:bodyPr>
+          <a:lstStyle/>
+          <a:p>
+            <a:pPr algn="l">
+              <a:lnSpc>
+                <a:spcPct val="125000"/>
+              </a:lnSpc>
+            </a:pPr>
+            <a:r>
+              <a:rPr sz="1500" b="1">
+                <a:solidFill>
+                  <a:srgbClr val="131A19"/>
+                </a:solidFill>
+                <a:latin typeface="맑은 고딕"/>
+              </a:rPr>
+              <a:t>딥러닝이 진 이유는 수용영역이 아니라 조건수</a:t>
+            </a:r>
+          </a:p>
+          <a:p>
+            <a:pPr algn="l">
+              <a:lnSpc>
+                <a:spcPct val="125000"/>
+              </a:lnSpc>
+              <a:spcBef>
+                <a:spcPts val="300"/>
+              </a:spcBef>
+            </a:pPr>
+            <a:r>
+              <a:rPr sz="1200" b="0">
+                <a:solidFill>
+                  <a:srgbClr val="66756F"/>
+                </a:solidFill>
+                <a:latin typeface="맑은 고딕"/>
+              </a:rPr>
+              <a:t>배포 U-Net 은 4단 다운샘플이라 이미 전역을 본다. 문제는 |D| 가 작은 주파수를 1000배 넘게 증폭해야 한다는 것이고, 그 어려움이 구조와 손실 양쪽에 있다.</a:t>
+            </a:r>
+          </a:p>
+        </p:txBody>
+      </p:sp>
+      <p:sp>
+        <p:nvSpPr>
+          <p:cNvPr id="9" name="Oval 8"/>
+          <p:cNvSpPr/>
+          <p:nvPr/>
+        </p:nvSpPr>
+        <p:spPr>
+          <a:xfrm>
+            <a:off x="685800" y="3675888"/>
+            <a:ext cx="310896" cy="310896"/>
+          </a:xfrm>
+          <a:prstGeom prst="ellipse">
+            <a:avLst/>
+          </a:prstGeom>
+          <a:solidFill>
+            <a:srgbClr val="0B6E5E"/>
+          </a:solidFill>
+          <a:ln>
+            <a:noFill/>
+          </a:ln>
+          <a:effectLst/>
+        </p:spPr>
+        <p:style>
+          <a:lnRef idx="1">
+            <a:schemeClr val="accent1"/>
+          </a:lnRef>
+          <a:fillRef idx="3">
+            <a:schemeClr val="accent1"/>
+          </a:fillRef>
+          <a:effectRef idx="2">
+            <a:schemeClr val="accent1"/>
+          </a:effectRef>
+          <a:fontRef idx="minor">
+            <a:schemeClr val="lt1"/>
+          </a:fontRef>
+        </p:style>
+        <p:txBody>
+          <a:bodyPr rtlCol="0" anchor="ctr"/>
+          <a:lstStyle/>
+          <a:p>
+            <a:pPr algn="ctr"/>
+            <a:r>
+              <a:rPr sz="1200" b="1">
+                <a:solidFill>
+                  <a:srgbClr val="FFFFFF"/>
+                </a:solidFill>
+                <a:latin typeface="Consolas"/>
+              </a:rPr>
+              <a:t>3</a:t>
+            </a:r>
+          </a:p>
+        </p:txBody>
+      </p:sp>
+      <p:sp>
+        <p:nvSpPr>
+          <p:cNvPr id="10" name="TextBox 9"/>
+          <p:cNvSpPr txBox="1"/>
+          <p:nvPr/>
+        </p:nvSpPr>
+        <p:spPr>
+          <a:xfrm>
+            <a:off x="1188720" y="3602736"/>
+            <a:ext cx="10241280" cy="822960"/>
+          </a:xfrm>
+          <a:prstGeom prst="rect">
+            <a:avLst/>
+          </a:prstGeom>
+          <a:noFill/>
+        </p:spPr>
+        <p:txBody>
+          <a:bodyPr wrap="square" anchor="t">
+            <a:spAutoFit/>
+          </a:bodyPr>
+          <a:lstStyle/>
+          <a:p>
+            <a:pPr algn="l">
+              <a:lnSpc>
+                <a:spcPct val="125000"/>
+              </a:lnSpc>
+            </a:pPr>
+            <a:r>
+              <a:rPr sz="1500" b="1">
+                <a:solidFill>
+                  <a:srgbClr val="131A19"/>
+                </a:solidFill>
+                <a:latin typeface="맑은 고딕"/>
+              </a:rPr>
+              <a:t>고치면 이긴다 — 커널을 몰라도</a:t>
+            </a:r>
+          </a:p>
+          <a:p>
+            <a:pPr algn="l">
+              <a:lnSpc>
+                <a:spcPct val="125000"/>
+              </a:lnSpc>
+              <a:spcBef>
+                <a:spcPts val="300"/>
+              </a:spcBef>
+            </a:pPr>
+            <a:r>
+              <a:rPr sz="1200" b="0">
+                <a:solidFill>
+                  <a:srgbClr val="66756F"/>
+                </a:solidFill>
+                <a:latin typeface="맑은 고딕"/>
+              </a:rPr>
+              <a:t>주파수마다 최소제곱을 풀면 10장으로 107.9 dB, 200장으로 108.6 dB. 학습된 필터가 1/D 와 상관계수 1.000000. 같은 파라미터인데 최적화 방법만 바꿔 26.25 → 108.62.</a:t>
+            </a:r>
+          </a:p>
+        </p:txBody>
+      </p:sp>
+      <p:sp>
+        <p:nvSpPr>
+          <p:cNvPr id="11" name="Oval 10"/>
+          <p:cNvSpPr/>
+          <p:nvPr/>
+        </p:nvSpPr>
+        <p:spPr>
+          <a:xfrm>
+            <a:off x="685800" y="4608576"/>
+            <a:ext cx="310896" cy="310896"/>
+          </a:xfrm>
+          <a:prstGeom prst="ellipse">
+            <a:avLst/>
+          </a:prstGeom>
+          <a:solidFill>
+            <a:srgbClr val="0B6E5E"/>
+          </a:solidFill>
+          <a:ln>
+            <a:noFill/>
+          </a:ln>
+          <a:effectLst/>
+        </p:spPr>
+        <p:style>
+          <a:lnRef idx="1">
+            <a:schemeClr val="accent1"/>
+          </a:lnRef>
+          <a:fillRef idx="3">
+            <a:schemeClr val="accent1"/>
+          </a:fillRef>
+          <a:effectRef idx="2">
+            <a:schemeClr val="accent1"/>
+          </a:effectRef>
+          <a:fontRef idx="minor">
+            <a:schemeClr val="lt1"/>
+          </a:fontRef>
+        </p:style>
+        <p:txBody>
+          <a:bodyPr rtlCol="0" anchor="ctr"/>
+          <a:lstStyle/>
+          <a:p>
+            <a:pPr algn="ctr"/>
+            <a:r>
+              <a:rPr sz="1200" b="1">
+                <a:solidFill>
+                  <a:srgbClr val="FFFFFF"/>
+                </a:solidFill>
+                <a:latin typeface="Consolas"/>
+              </a:rPr>
+              <a:t>4</a:t>
+            </a:r>
+          </a:p>
+        </p:txBody>
+      </p:sp>
+      <p:sp>
+        <p:nvSpPr>
+          <p:cNvPr id="12" name="TextBox 11"/>
+          <p:cNvSpPr txBox="1"/>
+          <p:nvPr/>
+        </p:nvSpPr>
+        <p:spPr>
+          <a:xfrm>
+            <a:off x="1188720" y="4535424"/>
+            <a:ext cx="10241280" cy="822960"/>
+          </a:xfrm>
+          <a:prstGeom prst="rect">
+            <a:avLst/>
+          </a:prstGeom>
+          <a:noFill/>
+        </p:spPr>
+        <p:txBody>
+          <a:bodyPr wrap="square" anchor="t">
+            <a:spAutoFit/>
+          </a:bodyPr>
+          <a:lstStyle/>
+          <a:p>
+            <a:pPr algn="l">
+              <a:lnSpc>
+                <a:spcPct val="125000"/>
+              </a:lnSpc>
+            </a:pPr>
+            <a:r>
+              <a:rPr sz="1500" b="1">
+                <a:solidFill>
+                  <a:srgbClr val="131A19"/>
+                </a:solidFill>
+                <a:latin typeface="맑은 고딕"/>
+              </a:rPr>
+              <a:t>K 는 모델 오차를 흡수하는 손잡이</a:t>
+            </a:r>
+          </a:p>
+          <a:p>
+            <a:pPr algn="l">
+              <a:lnSpc>
+                <a:spcPct val="125000"/>
+              </a:lnSpc>
+              <a:spcBef>
+                <a:spcPts val="300"/>
+              </a:spcBef>
+            </a:pPr>
+            <a:r>
+              <a:rPr sz="1200" b="0">
+                <a:solidFill>
+                  <a:srgbClr val="66756F"/>
+                </a:solidFill>
+                <a:latin typeface="맑은 고딕"/>
+              </a:rPr>
+              <a:t>잡음이든 커널 방향 오차든 같은 자리로 들어간다. 노이즈가 있으면 학습된 필터가 자동으로 Wiener 가 되고, 주파수마다 다른 K 를 갖기 때문에 손으로 튜닝한 스칼라 K 를 이긴다.</a:t>
+            </a:r>
+          </a:p>
+        </p:txBody>
+      </p:sp>
+      <p:sp>
+        <p:nvSpPr>
+          <p:cNvPr id="13" name="Oval 12"/>
+          <p:cNvSpPr/>
+          <p:nvPr/>
+        </p:nvSpPr>
+        <p:spPr>
+          <a:xfrm>
+            <a:off x="685800" y="5541264"/>
+            <a:ext cx="310896" cy="310896"/>
+          </a:xfrm>
+          <a:prstGeom prst="ellipse">
+            <a:avLst/>
+          </a:prstGeom>
+          <a:solidFill>
+            <a:srgbClr val="0B6E5E"/>
+          </a:solidFill>
+          <a:ln>
+            <a:noFill/>
+          </a:ln>
+          <a:effectLst/>
+        </p:spPr>
+        <p:style>
+          <a:lnRef idx="1">
+            <a:schemeClr val="accent1"/>
+          </a:lnRef>
+          <a:fillRef idx="3">
+            <a:schemeClr val="accent1"/>
+          </a:fillRef>
+          <a:effectRef idx="2">
+            <a:schemeClr val="accent1"/>
+          </a:effectRef>
+          <a:fontRef idx="minor">
+            <a:schemeClr val="lt1"/>
+          </a:fontRef>
+        </p:style>
+        <p:txBody>
+          <a:bodyPr rtlCol="0" anchor="ctr"/>
+          <a:lstStyle/>
+          <a:p>
+            <a:pPr algn="ctr"/>
+            <a:r>
+              <a:rPr sz="1200" b="1">
+                <a:solidFill>
+                  <a:srgbClr val="FFFFFF"/>
+                </a:solidFill>
+                <a:latin typeface="Consolas"/>
+              </a:rPr>
+              <a:t>5</a:t>
+            </a:r>
+          </a:p>
+        </p:txBody>
+      </p:sp>
+      <p:sp>
+        <p:nvSpPr>
+          <p:cNvPr id="14" name="TextBox 13"/>
+          <p:cNvSpPr txBox="1"/>
+          <p:nvPr/>
+        </p:nvSpPr>
+        <p:spPr>
+          <a:xfrm>
+            <a:off x="1188720" y="5468112"/>
+            <a:ext cx="10241280" cy="822960"/>
+          </a:xfrm>
+          <a:prstGeom prst="rect">
+            <a:avLst/>
+          </a:prstGeom>
+          <a:noFill/>
+        </p:spPr>
+        <p:txBody>
+          <a:bodyPr wrap="square" anchor="t">
+            <a:spAutoFit/>
+          </a:bodyPr>
+          <a:lstStyle/>
+          <a:p>
+            <a:pPr algn="l">
+              <a:lnSpc>
+                <a:spcPct val="125000"/>
+              </a:lnSpc>
+            </a:pPr>
+            <a:r>
+              <a:rPr sz="1500" b="1">
+                <a:solidFill>
+                  <a:srgbClr val="131A19"/>
+                </a:solidFill>
+                <a:latin typeface="맑은 고딕"/>
+              </a:rPr>
+              <a:t>그리고 이 답은 종잇장이다</a:t>
+            </a:r>
+          </a:p>
+          <a:p>
+            <a:pPr algn="l">
+              <a:lnSpc>
+                <a:spcPct val="125000"/>
+              </a:lnSpc>
+              <a:spcBef>
+                <a:spcPts val="300"/>
+              </a:spcBef>
+            </a:pPr>
+            <a:r>
+              <a:rPr sz="1200" b="0">
+                <a:solidFill>
+                  <a:srgbClr val="66756F"/>
+                </a:solidFill>
+                <a:latin typeface="맑은 고딕"/>
+              </a:rPr>
+              <a:t>σ=1e-3 노이즈면 109.9 dB 가 7.9 dB 로 무너진다. 3일차는 g = h*f + n 이고, 그때 비로소 학습이 다시 필요해진다.</a:t>
+            </a:r>
+          </a:p>
+        </p:txBody>
+      </p:sp>
+      <p:sp>
+        <p:nvSpPr>
+          <p:cNvPr id="15" name="TextBox 14"/>
+          <p:cNvSpPr txBox="1"/>
+          <p:nvPr/>
+        </p:nvSpPr>
+        <p:spPr>
+          <a:xfrm>
+            <a:off x="640080" y="6355080"/>
+            <a:ext cx="10972800" cy="274320"/>
+          </a:xfrm>
+          <a:prstGeom prst="rect">
+            <a:avLst/>
+          </a:prstGeom>
+          <a:noFill/>
+        </p:spPr>
+        <p:txBody>
+          <a:bodyPr wrap="square" anchor="t">
+            <a:spAutoFit/>
+          </a:bodyPr>
+          <a:lstStyle/>
+          <a:p>
+            <a:pPr algn="l">
+              <a:lnSpc>
+                <a:spcPct val="125000"/>
+              </a:lnSpc>
+            </a:pPr>
+            <a:r>
+              <a:rPr sz="1000" b="0">
+                <a:solidFill>
+                  <a:srgbClr val="66756F"/>
+                </a:solidFill>
+                <a:latin typeface="Consolas"/>
+              </a:rPr>
+              <a:t>제출값  PSNR 109.86   SSIM 1.0000   (배포 U-Net 25.59 대비 +84.27 dB)</a:t>
+            </a:r>
+          </a:p>
+        </p:txBody>
+      </p:sp>
+    </p:spTree>
+  </p:cSld>
+  <p:clrMapOvr>
+    <a:masterClrMapping/>
+  </p:clrMapOvr>
+</p:sld>
+</file>
+
 <file path=ppt/slides/slide2.xml><?xml version="1.0" encoding="utf-8"?>
 <p:sld xmlns:a="http://schemas.openxmlformats.org/drawingml/2006/main" xmlns:p="http://schemas.openxmlformats.org/presentationml/2006/main" xmlns:r="http://schemas.openxmlformats.org/officeDocument/2006/relationships">
   <p:cSld>
@@ -7145,6 +8682,2399 @@
                 </a:solidFill>
                 <a:latin typeface="Consolas"/>
               </a:rPr>
+              <a:t>3 · MODEL</a:t>
+            </a:r>
+          </a:p>
+        </p:txBody>
+      </p:sp>
+      <p:sp>
+        <p:nvSpPr>
+          <p:cNvPr id="3" name="TextBox 2"/>
+          <p:cNvSpPr txBox="1"/>
+          <p:nvPr/>
+        </p:nvSpPr>
+        <p:spPr>
+          <a:xfrm>
+            <a:off x="640080" y="713232"/>
+            <a:ext cx="10972800" cy="548640"/>
+          </a:xfrm>
+          <a:prstGeom prst="rect">
+            <a:avLst/>
+          </a:prstGeom>
+          <a:noFill/>
+        </p:spPr>
+        <p:txBody>
+          <a:bodyPr wrap="square" anchor="t">
+            <a:spAutoFit/>
+          </a:bodyPr>
+          <a:lstStyle/>
+          <a:p>
+            <a:pPr algn="l">
+              <a:lnSpc>
+                <a:spcPct val="125000"/>
+              </a:lnSpc>
+            </a:pPr>
+            <a:r>
+              <a:rPr sz="3000" b="1">
+                <a:solidFill>
+                  <a:srgbClr val="131A19"/>
+                </a:solidFill>
+                <a:latin typeface="맑은 고딕"/>
+              </a:rPr>
+              <a:t>모델을 안 썼다</a:t>
+            </a:r>
+          </a:p>
+        </p:txBody>
+      </p:sp>
+      <p:sp>
+        <p:nvSpPr>
+          <p:cNvPr id="4" name="TextBox 3"/>
+          <p:cNvSpPr txBox="1"/>
+          <p:nvPr/>
+        </p:nvSpPr>
+        <p:spPr>
+          <a:xfrm>
+            <a:off x="640080" y="1371600"/>
+            <a:ext cx="10972800" cy="365760"/>
+          </a:xfrm>
+          <a:prstGeom prst="rect">
+            <a:avLst/>
+          </a:prstGeom>
+          <a:noFill/>
+        </p:spPr>
+        <p:txBody>
+          <a:bodyPr wrap="square" anchor="t">
+            <a:spAutoFit/>
+          </a:bodyPr>
+          <a:lstStyle/>
+          <a:p>
+            <a:pPr algn="l">
+              <a:lnSpc>
+                <a:spcPct val="125000"/>
+              </a:lnSpc>
+            </a:pPr>
+            <a:r>
+              <a:rPr sz="1400" b="0">
+                <a:solidFill>
+                  <a:srgbClr val="66756F"/>
+                </a:solidFill>
+                <a:latin typeface="맑은 고딕"/>
+              </a:rPr>
+              <a:t>신경망도, 층도, 활성함수도 없다</a:t>
+            </a:r>
+          </a:p>
+        </p:txBody>
+      </p:sp>
+      <p:sp>
+        <p:nvSpPr>
+          <p:cNvPr id="5" name="Rectangle 4"/>
+          <p:cNvSpPr/>
+          <p:nvPr/>
+        </p:nvSpPr>
+        <p:spPr>
+          <a:xfrm>
+            <a:off x="640080" y="1874520"/>
+            <a:ext cx="10908792" cy="15240"/>
+          </a:xfrm>
+          <a:prstGeom prst="rect">
+            <a:avLst/>
+          </a:prstGeom>
+          <a:solidFill>
+            <a:srgbClr val="DCE3E0"/>
+          </a:solidFill>
+          <a:ln>
+            <a:noFill/>
+          </a:ln>
+          <a:effectLst/>
+        </p:spPr>
+        <p:style>
+          <a:lnRef idx="1">
+            <a:schemeClr val="accent1"/>
+          </a:lnRef>
+          <a:fillRef idx="3">
+            <a:schemeClr val="accent1"/>
+          </a:fillRef>
+          <a:effectRef idx="2">
+            <a:schemeClr val="accent1"/>
+          </a:effectRef>
+          <a:fontRef idx="minor">
+            <a:schemeClr val="lt1"/>
+          </a:fontRef>
+        </p:style>
+        <p:txBody>
+          <a:bodyPr rtlCol="0" anchor="ctr"/>
+          <a:lstStyle/>
+          <a:p>
+            <a:pPr algn="ctr"/>
+          </a:p>
+        </p:txBody>
+      </p:sp>
+      <p:sp>
+        <p:nvSpPr>
+          <p:cNvPr id="6" name="Rounded Rectangle 5"/>
+          <p:cNvSpPr/>
+          <p:nvPr/>
+        </p:nvSpPr>
+        <p:spPr>
+          <a:xfrm>
+            <a:off x="640080" y="2148840"/>
+            <a:ext cx="10881360" cy="914400"/>
+          </a:xfrm>
+          <a:prstGeom prst="roundRect">
+            <a:avLst>
+              <a:gd name="adj" fmla="val 4000"/>
+            </a:avLst>
+          </a:prstGeom>
+          <a:solidFill>
+            <a:srgbClr val="DCEDE8"/>
+          </a:solidFill>
+          <a:ln w="9525">
+            <a:solidFill>
+              <a:srgbClr val="0B6E5E"/>
+            </a:solidFill>
+          </a:ln>
+          <a:effectLst/>
+        </p:spPr>
+        <p:style>
+          <a:lnRef idx="1">
+            <a:schemeClr val="accent1"/>
+          </a:lnRef>
+          <a:fillRef idx="3">
+            <a:schemeClr val="accent1"/>
+          </a:fillRef>
+          <a:effectRef idx="2">
+            <a:schemeClr val="accent1"/>
+          </a:effectRef>
+          <a:fontRef idx="minor">
+            <a:schemeClr val="lt1"/>
+          </a:fontRef>
+        </p:style>
+        <p:txBody>
+          <a:bodyPr rtlCol="0" anchor="ctr"/>
+          <a:lstStyle/>
+          <a:p>
+            <a:pPr algn="ctr"/>
+          </a:p>
+        </p:txBody>
+      </p:sp>
+      <p:sp>
+        <p:nvSpPr>
+          <p:cNvPr id="7" name="TextBox 6"/>
+          <p:cNvSpPr txBox="1"/>
+          <p:nvPr/>
+        </p:nvSpPr>
+        <p:spPr>
+          <a:xfrm>
+            <a:off x="868680" y="2240280"/>
+            <a:ext cx="10424160" cy="777240"/>
+          </a:xfrm>
+          <a:prstGeom prst="rect">
+            <a:avLst/>
+          </a:prstGeom>
+          <a:noFill/>
+        </p:spPr>
+        <p:txBody>
+          <a:bodyPr wrap="square" anchor="t">
+            <a:spAutoFit/>
+          </a:bodyPr>
+          <a:lstStyle/>
+          <a:p>
+            <a:pPr algn="l">
+              <a:lnSpc>
+                <a:spcPct val="125000"/>
+              </a:lnSpc>
+            </a:pPr>
+            <a:r>
+              <a:rPr sz="1550" b="1">
+                <a:solidFill>
+                  <a:srgbClr val="131A19"/>
+                </a:solidFill>
+                <a:latin typeface="Consolas"/>
+              </a:rPr>
+              <a:t>y = ifft2( fft2(x) · W ),   W ∈ ℝ^(256×256)</a:t>
+            </a:r>
+          </a:p>
+          <a:p>
+            <a:pPr algn="l">
+              <a:lnSpc>
+                <a:spcPct val="125000"/>
+              </a:lnSpc>
+              <a:spcBef>
+                <a:spcPts val="500"/>
+              </a:spcBef>
+            </a:pPr>
+            <a:r>
+              <a:rPr sz="1200" b="0">
+                <a:solidFill>
+                  <a:srgbClr val="3C4947"/>
+                </a:solidFill>
+                <a:latin typeface="맑은 고딕"/>
+              </a:rPr>
+              <a:t>배열 하나가 모델의 전부다. 푸리에 기저의 대각 연산자 — 주파수마다 상수를 곱할 뿐 주파수끼리 섞지 않는다. 공간 영역으로 옮기면 256×256 커널로 한 번 컨볼루션하는 것과 같다.</a:t>
+            </a:r>
+          </a:p>
+        </p:txBody>
+      </p:sp>
+      <p:graphicFrame>
+        <p:nvGraphicFramePr>
+          <p:cNvPr id="8" name="Table 7"/>
+          <p:cNvGraphicFramePr>
+            <a:graphicFrameLocks noGrp="1"/>
+          </p:cNvGraphicFramePr>
+          <p:nvPr/>
+        </p:nvGraphicFramePr>
+        <p:xfrm>
+          <a:off x="640080" y="3246120"/>
+          <a:ext cx="10881360" cy="1371600"/>
+        </p:xfrm>
+        <a:graphic>
+          <a:graphicData uri="http://schemas.openxmlformats.org/drawingml/2006/table">
+            <a:tbl>
+              <a:tblPr firstRow="1" bandRow="1">
+                <a:tableStyleId>{5C22544A-7EE6-4342-B048-85BDC9FD1C3A}</a:tableStyleId>
+              </a:tblPr>
+              <a:tblGrid>
+                <a:gridCol w="2194560"/>
+                <a:gridCol w="1828800"/>
+                <a:gridCol w="5029200"/>
+                <a:gridCol w="1828800"/>
+              </a:tblGrid>
+              <a:tr h="274320">
+                <a:tc>
+                  <a:txBody>
+                    <a:bodyPr/>
+                    <a:lstStyle/>
+                    <a:p>
+                      <a:pPr algn="l"/>
+                    </a:p>
+                  </a:txBody>
+                  <a:tcPr marL="82296" marR="82296" marT="27432" marB="27432" anchor="ctr">
+                    <a:solidFill>
+                      <a:srgbClr val="DCEDE8"/>
+                    </a:solidFill>
+                  </a:tcPr>
+                </a:tc>
+                <a:tc>
+                  <a:txBody>
+                    <a:bodyPr/>
+                    <a:lstStyle/>
+                    <a:p>
+                      <a:pPr algn="r"/>
+                      <a:r>
+                        <a:rPr sz="1150" b="1">
+                          <a:solidFill>
+                            <a:srgbClr val="131A19"/>
+                          </a:solidFill>
+                          <a:latin typeface="Consolas"/>
+                        </a:rPr>
+                        <a:t>파라미터</a:t>
+                      </a:r>
+                    </a:p>
+                  </a:txBody>
+                  <a:tcPr marL="82296" marR="82296" marT="27432" marB="27432" anchor="ctr">
+                    <a:solidFill>
+                      <a:srgbClr val="DCEDE8"/>
+                    </a:solidFill>
+                  </a:tcPr>
+                </a:tc>
+                <a:tc>
+                  <a:txBody>
+                    <a:bodyPr/>
+                    <a:lstStyle/>
+                    <a:p>
+                      <a:pPr algn="r"/>
+                      <a:r>
+                        <a:rPr sz="1150" b="1">
+                          <a:solidFill>
+                            <a:srgbClr val="131A19"/>
+                          </a:solidFill>
+                          <a:latin typeface="Consolas"/>
+                        </a:rPr>
+                        <a:t>구조</a:t>
+                      </a:r>
+                    </a:p>
+                  </a:txBody>
+                  <a:tcPr marL="82296" marR="82296" marT="27432" marB="27432" anchor="ctr">
+                    <a:solidFill>
+                      <a:srgbClr val="DCEDE8"/>
+                    </a:solidFill>
+                  </a:tcPr>
+                </a:tc>
+                <a:tc>
+                  <a:txBody>
+                    <a:bodyPr/>
+                    <a:lstStyle/>
+                    <a:p>
+                      <a:pPr algn="r"/>
+                      <a:r>
+                        <a:rPr sz="1150" b="1">
+                          <a:solidFill>
+                            <a:srgbClr val="131A19"/>
+                          </a:solidFill>
+                          <a:latin typeface="Consolas"/>
+                        </a:rPr>
+                        <a:t>PSNR</a:t>
+                      </a:r>
+                    </a:p>
+                  </a:txBody>
+                  <a:tcPr marL="82296" marR="82296" marT="27432" marB="27432" anchor="ctr">
+                    <a:solidFill>
+                      <a:srgbClr val="DCEDE8"/>
+                    </a:solidFill>
+                  </a:tcPr>
+                </a:tc>
+              </a:tr>
+              <a:tr h="274320">
+                <a:tc>
+                  <a:txBody>
+                    <a:bodyPr/>
+                    <a:lstStyle/>
+                    <a:p>
+                      <a:pPr algn="l"/>
+                      <a:r>
+                        <a:rPr sz="1150" b="0">
+                          <a:solidFill>
+                            <a:srgbClr val="3C4947"/>
+                          </a:solidFill>
+                          <a:latin typeface="맑은 고딕"/>
+                        </a:rPr>
+                        <a:t>배포 U-Net</a:t>
+                      </a:r>
+                    </a:p>
+                  </a:txBody>
+                  <a:tcPr marL="82296" marR="82296" marT="27432" marB="27432" anchor="ctr">
+                    <a:solidFill>
+                      <a:srgbClr val="FFFFFF"/>
+                    </a:solidFill>
+                  </a:tcPr>
+                </a:tc>
+                <a:tc>
+                  <a:txBody>
+                    <a:bodyPr/>
+                    <a:lstStyle/>
+                    <a:p>
+                      <a:pPr algn="r"/>
+                      <a:r>
+                        <a:rPr sz="1150" b="0">
+                          <a:solidFill>
+                            <a:srgbClr val="3C4947"/>
+                          </a:solidFill>
+                          <a:latin typeface="Consolas"/>
+                        </a:rPr>
+                        <a:t>842,000</a:t>
+                      </a:r>
+                    </a:p>
+                  </a:txBody>
+                  <a:tcPr marL="82296" marR="82296" marT="27432" marB="27432" anchor="ctr">
+                    <a:solidFill>
+                      <a:srgbClr val="FFFFFF"/>
+                    </a:solidFill>
+                  </a:tcPr>
+                </a:tc>
+                <a:tc>
+                  <a:txBody>
+                    <a:bodyPr/>
+                    <a:lstStyle/>
+                    <a:p>
+                      <a:pPr algn="r"/>
+                      <a:r>
+                        <a:rPr sz="1150" b="0">
+                          <a:solidFill>
+                            <a:srgbClr val="3C4947"/>
+                          </a:solidFill>
+                          <a:latin typeface="Consolas"/>
+                        </a:rPr>
+                        <a:t>ConvBlock ×9, 다운샘플 4단, skip</a:t>
+                      </a:r>
+                    </a:p>
+                  </a:txBody>
+                  <a:tcPr marL="82296" marR="82296" marT="27432" marB="27432" anchor="ctr">
+                    <a:solidFill>
+                      <a:srgbClr val="FFFFFF"/>
+                    </a:solidFill>
+                  </a:tcPr>
+                </a:tc>
+                <a:tc>
+                  <a:txBody>
+                    <a:bodyPr/>
+                    <a:lstStyle/>
+                    <a:p>
+                      <a:pPr algn="r"/>
+                      <a:r>
+                        <a:rPr sz="1150" b="0">
+                          <a:solidFill>
+                            <a:srgbClr val="3C4947"/>
+                          </a:solidFill>
+                          <a:latin typeface="Consolas"/>
+                        </a:rPr>
+                        <a:t>25.59</a:t>
+                      </a:r>
+                    </a:p>
+                  </a:txBody>
+                  <a:tcPr marL="82296" marR="82296" marT="27432" marB="27432" anchor="ctr">
+                    <a:solidFill>
+                      <a:srgbClr val="FFFFFF"/>
+                    </a:solidFill>
+                  </a:tcPr>
+                </a:tc>
+              </a:tr>
+              <a:tr h="274320">
+                <a:tc>
+                  <a:txBody>
+                    <a:bodyPr/>
+                    <a:lstStyle/>
+                    <a:p>
+                      <a:pPr algn="l"/>
+                      <a:r>
+                        <a:rPr sz="1150" b="0">
+                          <a:solidFill>
+                            <a:srgbClr val="3C4947"/>
+                          </a:solidFill>
+                          <a:latin typeface="맑은 고딕"/>
+                        </a:rPr>
+                        <a:t>DnCNN</a:t>
+                      </a:r>
+                    </a:p>
+                  </a:txBody>
+                  <a:tcPr marL="82296" marR="82296" marT="27432" marB="27432" anchor="ctr">
+                    <a:solidFill>
+                      <a:srgbClr val="FFFFFF"/>
+                    </a:solidFill>
+                  </a:tcPr>
+                </a:tc>
+                <a:tc>
+                  <a:txBody>
+                    <a:bodyPr/>
+                    <a:lstStyle/>
+                    <a:p>
+                      <a:pPr algn="r"/>
+                      <a:r>
+                        <a:rPr sz="1150" b="0">
+                          <a:solidFill>
+                            <a:srgbClr val="3C4947"/>
+                          </a:solidFill>
+                          <a:latin typeface="Consolas"/>
+                        </a:rPr>
+                        <a:t>593,024</a:t>
+                      </a:r>
+                    </a:p>
+                  </a:txBody>
+                  <a:tcPr marL="82296" marR="82296" marT="27432" marB="27432" anchor="ctr">
+                    <a:solidFill>
+                      <a:srgbClr val="FFFFFF"/>
+                    </a:solidFill>
+                  </a:tcPr>
+                </a:tc>
+                <a:tc>
+                  <a:txBody>
+                    <a:bodyPr/>
+                    <a:lstStyle/>
+                    <a:p>
+                      <a:pPr algn="r"/>
+                      <a:r>
+                        <a:rPr sz="1150" b="0">
+                          <a:solidFill>
+                            <a:srgbClr val="3C4947"/>
+                          </a:solidFill>
+                          <a:latin typeface="Consolas"/>
+                        </a:rPr>
+                        <a:t>3×3 conv 17층</a:t>
+                      </a:r>
+                    </a:p>
+                  </a:txBody>
+                  <a:tcPr marL="82296" marR="82296" marT="27432" marB="27432" anchor="ctr">
+                    <a:solidFill>
+                      <a:srgbClr val="FFFFFF"/>
+                    </a:solidFill>
+                  </a:tcPr>
+                </a:tc>
+                <a:tc>
+                  <a:txBody>
+                    <a:bodyPr/>
+                    <a:lstStyle/>
+                    <a:p>
+                      <a:pPr algn="r"/>
+                      <a:r>
+                        <a:rPr sz="1150" b="0">
+                          <a:solidFill>
+                            <a:srgbClr val="3C4947"/>
+                          </a:solidFill>
+                          <a:latin typeface="Consolas"/>
+                        </a:rPr>
+                        <a:t>—</a:t>
+                      </a:r>
+                    </a:p>
+                  </a:txBody>
+                  <a:tcPr marL="82296" marR="82296" marT="27432" marB="27432" anchor="ctr">
+                    <a:solidFill>
+                      <a:srgbClr val="FFFFFF"/>
+                    </a:solidFill>
+                  </a:tcPr>
+                </a:tc>
+              </a:tr>
+              <a:tr h="274320">
+                <a:tc>
+                  <a:txBody>
+                    <a:bodyPr/>
+                    <a:lstStyle/>
+                    <a:p>
+                      <a:pPr algn="l"/>
+                      <a:r>
+                        <a:rPr sz="1150" b="0">
+                          <a:solidFill>
+                            <a:srgbClr val="3C4947"/>
+                          </a:solidFill>
+                          <a:latin typeface="맑은 고딕"/>
+                        </a:rPr>
+                        <a:t>DRUNet</a:t>
+                      </a:r>
+                    </a:p>
+                  </a:txBody>
+                  <a:tcPr marL="82296" marR="82296" marT="27432" marB="27432" anchor="ctr">
+                    <a:solidFill>
+                      <a:srgbClr val="FFFFFF"/>
+                    </a:solidFill>
+                  </a:tcPr>
+                </a:tc>
+                <a:tc>
+                  <a:txBody>
+                    <a:bodyPr/>
+                    <a:lstStyle/>
+                    <a:p>
+                      <a:pPr algn="r"/>
+                      <a:r>
+                        <a:rPr sz="1150" b="0">
+                          <a:solidFill>
+                            <a:srgbClr val="3C4947"/>
+                          </a:solidFill>
+                          <a:latin typeface="Consolas"/>
+                        </a:rPr>
+                        <a:t>32,638,080</a:t>
+                      </a:r>
+                    </a:p>
+                  </a:txBody>
+                  <a:tcPr marL="82296" marR="82296" marT="27432" marB="27432" anchor="ctr">
+                    <a:solidFill>
+                      <a:srgbClr val="FFFFFF"/>
+                    </a:solidFill>
+                  </a:tcPr>
+                </a:tc>
+                <a:tc>
+                  <a:txBody>
+                    <a:bodyPr/>
+                    <a:lstStyle/>
+                    <a:p>
+                      <a:pPr algn="r"/>
+                      <a:r>
+                        <a:rPr sz="1150" b="0">
+                          <a:solidFill>
+                            <a:srgbClr val="3C4947"/>
+                          </a:solidFill>
+                          <a:latin typeface="Consolas"/>
+                        </a:rPr>
+                        <a:t>U-Net + res block</a:t>
+                      </a:r>
+                    </a:p>
+                  </a:txBody>
+                  <a:tcPr marL="82296" marR="82296" marT="27432" marB="27432" anchor="ctr">
+                    <a:solidFill>
+                      <a:srgbClr val="FFFFFF"/>
+                    </a:solidFill>
+                  </a:tcPr>
+                </a:tc>
+                <a:tc>
+                  <a:txBody>
+                    <a:bodyPr/>
+                    <a:lstStyle/>
+                    <a:p>
+                      <a:pPr algn="r"/>
+                      <a:r>
+                        <a:rPr sz="1150" b="0">
+                          <a:solidFill>
+                            <a:srgbClr val="3C4947"/>
+                          </a:solidFill>
+                          <a:latin typeface="Consolas"/>
+                        </a:rPr>
+                        <a:t>—</a:t>
+                      </a:r>
+                    </a:p>
+                  </a:txBody>
+                  <a:tcPr marL="82296" marR="82296" marT="27432" marB="27432" anchor="ctr">
+                    <a:solidFill>
+                      <a:srgbClr val="FFFFFF"/>
+                    </a:solidFill>
+                  </a:tcPr>
+                </a:tc>
+              </a:tr>
+              <a:tr h="274320">
+                <a:tc>
+                  <a:txBody>
+                    <a:bodyPr/>
+                    <a:lstStyle/>
+                    <a:p>
+                      <a:pPr algn="l"/>
+                      <a:r>
+                        <a:rPr sz="1150" b="1">
+                          <a:solidFill>
+                            <a:srgbClr val="131A19"/>
+                          </a:solidFill>
+                          <a:latin typeface="맑은 고딕"/>
+                        </a:rPr>
+                        <a:t>학습된 역필터</a:t>
+                      </a:r>
+                    </a:p>
+                  </a:txBody>
+                  <a:tcPr marL="82296" marR="82296" marT="27432" marB="27432" anchor="ctr">
+                    <a:solidFill>
+                      <a:srgbClr val="ECF5F2"/>
+                    </a:solidFill>
+                  </a:tcPr>
+                </a:tc>
+                <a:tc>
+                  <a:txBody>
+                    <a:bodyPr/>
+                    <a:lstStyle/>
+                    <a:p>
+                      <a:pPr algn="r"/>
+                      <a:r>
+                        <a:rPr sz="1150" b="1">
+                          <a:solidFill>
+                            <a:srgbClr val="131A19"/>
+                          </a:solidFill>
+                          <a:latin typeface="Consolas"/>
+                        </a:rPr>
+                        <a:t>65,536</a:t>
+                      </a:r>
+                    </a:p>
+                  </a:txBody>
+                  <a:tcPr marL="82296" marR="82296" marT="27432" marB="27432" anchor="ctr">
+                    <a:solidFill>
+                      <a:srgbClr val="ECF5F2"/>
+                    </a:solidFill>
+                  </a:tcPr>
+                </a:tc>
+                <a:tc>
+                  <a:txBody>
+                    <a:bodyPr/>
+                    <a:lstStyle/>
+                    <a:p>
+                      <a:pPr algn="r"/>
+                      <a:r>
+                        <a:rPr sz="1150" b="1">
+                          <a:solidFill>
+                            <a:srgbClr val="131A19"/>
+                          </a:solidFill>
+                          <a:latin typeface="Consolas"/>
+                        </a:rPr>
+                        <a:t>배열 하나. 층 0개</a:t>
+                      </a:r>
+                    </a:p>
+                  </a:txBody>
+                  <a:tcPr marL="82296" marR="82296" marT="27432" marB="27432" anchor="ctr">
+                    <a:solidFill>
+                      <a:srgbClr val="ECF5F2"/>
+                    </a:solidFill>
+                  </a:tcPr>
+                </a:tc>
+                <a:tc>
+                  <a:txBody>
+                    <a:bodyPr/>
+                    <a:lstStyle/>
+                    <a:p>
+                      <a:pPr algn="r"/>
+                      <a:r>
+                        <a:rPr sz="1150" b="1">
+                          <a:solidFill>
+                            <a:srgbClr val="131A19"/>
+                          </a:solidFill>
+                          <a:latin typeface="Consolas"/>
+                        </a:rPr>
+                        <a:t>108.62</a:t>
+                      </a:r>
+                    </a:p>
+                  </a:txBody>
+                  <a:tcPr marL="82296" marR="82296" marT="27432" marB="27432" anchor="ctr">
+                    <a:solidFill>
+                      <a:srgbClr val="ECF5F2"/>
+                    </a:solidFill>
+                  </a:tcPr>
+                </a:tc>
+              </a:tr>
+            </a:tbl>
+          </a:graphicData>
+        </a:graphic>
+      </p:graphicFrame>
+      <p:sp>
+        <p:nvSpPr>
+          <p:cNvPr id="9" name="Rounded Rectangle 8"/>
+          <p:cNvSpPr/>
+          <p:nvPr/>
+        </p:nvSpPr>
+        <p:spPr>
+          <a:xfrm>
+            <a:off x="640080" y="4818888"/>
+            <a:ext cx="5303520" cy="1783080"/>
+          </a:xfrm>
+          <a:prstGeom prst="roundRect">
+            <a:avLst>
+              <a:gd name="adj" fmla="val 4000"/>
+            </a:avLst>
+          </a:prstGeom>
+          <a:solidFill>
+            <a:srgbClr val="F3F6F5"/>
+          </a:solidFill>
+          <a:ln w="9525">
+            <a:solidFill>
+              <a:srgbClr val="8C4A6B"/>
+            </a:solidFill>
+          </a:ln>
+          <a:effectLst/>
+        </p:spPr>
+        <p:style>
+          <a:lnRef idx="1">
+            <a:schemeClr val="accent1"/>
+          </a:lnRef>
+          <a:fillRef idx="3">
+            <a:schemeClr val="accent1"/>
+          </a:fillRef>
+          <a:effectRef idx="2">
+            <a:schemeClr val="accent1"/>
+          </a:effectRef>
+          <a:fontRef idx="minor">
+            <a:schemeClr val="lt1"/>
+          </a:fontRef>
+        </p:style>
+        <p:txBody>
+          <a:bodyPr rtlCol="0" anchor="ctr"/>
+          <a:lstStyle/>
+          <a:p>
+            <a:pPr algn="ctr"/>
+          </a:p>
+        </p:txBody>
+      </p:sp>
+      <p:sp>
+        <p:nvSpPr>
+          <p:cNvPr id="10" name="TextBox 9"/>
+          <p:cNvSpPr txBox="1"/>
+          <p:nvPr/>
+        </p:nvSpPr>
+        <p:spPr>
+          <a:xfrm>
+            <a:off x="868680" y="4946904"/>
+            <a:ext cx="4846320" cy="1554480"/>
+          </a:xfrm>
+          <a:prstGeom prst="rect">
+            <a:avLst/>
+          </a:prstGeom>
+          <a:noFill/>
+        </p:spPr>
+        <p:txBody>
+          <a:bodyPr wrap="square" anchor="t">
+            <a:spAutoFit/>
+          </a:bodyPr>
+          <a:lstStyle/>
+          <a:p>
+            <a:pPr algn="l">
+              <a:lnSpc>
+                <a:spcPct val="125000"/>
+              </a:lnSpc>
+            </a:pPr>
+            <a:r>
+              <a:rPr sz="1500" b="1">
+                <a:solidFill>
+                  <a:srgbClr val="8C4A6B"/>
+                </a:solidFill>
+                <a:latin typeface="맑은 고딕"/>
+              </a:rPr>
+              <a:t>신경망으로도 해봤고 실패했다</a:t>
+            </a:r>
+          </a:p>
+          <a:p>
+            <a:pPr algn="l">
+              <a:lnSpc>
+                <a:spcPct val="125000"/>
+              </a:lnSpc>
+              <a:spcBef>
+                <a:spcPts val="800"/>
+              </a:spcBef>
+            </a:pPr>
+            <a:r>
+              <a:rPr sz="1250" b="0">
+                <a:solidFill>
+                  <a:srgbClr val="3C4947"/>
+                </a:solidFill>
+                <a:latin typeface="맑은 고딕"/>
+              </a:rPr>
+              <a:t>같은 W 를 파라미터로 두고 Adam 으로 경사하강 → 26.25 dB.</a:t>
+            </a:r>
+          </a:p>
+          <a:p>
+            <a:pPr algn="l">
+              <a:lnSpc>
+                <a:spcPct val="125000"/>
+              </a:lnSpc>
+              <a:spcBef>
+                <a:spcPts val="500"/>
+              </a:spcBef>
+            </a:pPr>
+            <a:r>
+              <a:rPr sz="1250" b="0">
+                <a:solidFill>
+                  <a:srgbClr val="3C4947"/>
+                </a:solidFill>
+                <a:latin typeface="맑은 고딕"/>
+              </a:rPr>
+              <a:t>정답이 가설 공간 안에 정확히 있는데도 못 찾는다. 학습된 이득 최대 4.8, 정답은 44074.</a:t>
+            </a:r>
+          </a:p>
+        </p:txBody>
+      </p:sp>
+      <p:sp>
+        <p:nvSpPr>
+          <p:cNvPr id="11" name="Rounded Rectangle 10"/>
+          <p:cNvSpPr/>
+          <p:nvPr/>
+        </p:nvSpPr>
+        <p:spPr>
+          <a:xfrm>
+            <a:off x="6217920" y="4818888"/>
+            <a:ext cx="5303520" cy="1783080"/>
+          </a:xfrm>
+          <a:prstGeom prst="roundRect">
+            <a:avLst>
+              <a:gd name="adj" fmla="val 4000"/>
+            </a:avLst>
+          </a:prstGeom>
+          <a:solidFill>
+            <a:srgbClr val="DCEDE8"/>
+          </a:solidFill>
+          <a:ln w="9525">
+            <a:solidFill>
+              <a:srgbClr val="0B6E5E"/>
+            </a:solidFill>
+          </a:ln>
+          <a:effectLst/>
+        </p:spPr>
+        <p:style>
+          <a:lnRef idx="1">
+            <a:schemeClr val="accent1"/>
+          </a:lnRef>
+          <a:fillRef idx="3">
+            <a:schemeClr val="accent1"/>
+          </a:fillRef>
+          <a:effectRef idx="2">
+            <a:schemeClr val="accent1"/>
+          </a:effectRef>
+          <a:fontRef idx="minor">
+            <a:schemeClr val="lt1"/>
+          </a:fontRef>
+        </p:style>
+        <p:txBody>
+          <a:bodyPr rtlCol="0" anchor="ctr"/>
+          <a:lstStyle/>
+          <a:p>
+            <a:pPr algn="ctr"/>
+          </a:p>
+        </p:txBody>
+      </p:sp>
+      <p:sp>
+        <p:nvSpPr>
+          <p:cNvPr id="12" name="TextBox 11"/>
+          <p:cNvSpPr txBox="1"/>
+          <p:nvPr/>
+        </p:nvSpPr>
+        <p:spPr>
+          <a:xfrm>
+            <a:off x="6446520" y="4946904"/>
+            <a:ext cx="4846320" cy="1554480"/>
+          </a:xfrm>
+          <a:prstGeom prst="rect">
+            <a:avLst/>
+          </a:prstGeom>
+          <a:noFill/>
+        </p:spPr>
+        <p:txBody>
+          <a:bodyPr wrap="square" anchor="t">
+            <a:spAutoFit/>
+          </a:bodyPr>
+          <a:lstStyle/>
+          <a:p>
+            <a:pPr algn="l">
+              <a:lnSpc>
+                <a:spcPct val="125000"/>
+              </a:lnSpc>
+            </a:pPr>
+            <a:r>
+              <a:rPr sz="1500" b="1">
+                <a:solidFill>
+                  <a:srgbClr val="131A19"/>
+                </a:solidFill>
+                <a:latin typeface="맑은 고딕"/>
+              </a:rPr>
+              <a:t>이긴 건 최적화 방법을 바꾼 것</a:t>
+            </a:r>
+          </a:p>
+          <a:p>
+            <a:pPr algn="l">
+              <a:lnSpc>
+                <a:spcPct val="125000"/>
+              </a:lnSpc>
+              <a:spcBef>
+                <a:spcPts val="800"/>
+              </a:spcBef>
+            </a:pPr>
+            <a:r>
+              <a:rPr sz="1250" b="0">
+                <a:solidFill>
+                  <a:srgbClr val="3C4947"/>
+                </a:solidFill>
+                <a:latin typeface="맑은 고딕"/>
+              </a:rPr>
+              <a:t>같은 모델·같은 파라미터·같은 데이터인데 26.25 → 108.62.</a:t>
+            </a:r>
+          </a:p>
+          <a:p>
+            <a:pPr algn="l">
+              <a:lnSpc>
+                <a:spcPct val="125000"/>
+              </a:lnSpc>
+              <a:spcBef>
+                <a:spcPts val="500"/>
+              </a:spcBef>
+            </a:pPr>
+            <a:r>
+              <a:rPr sz="1250" b="0">
+                <a:solidFill>
+                  <a:srgbClr val="3C4947"/>
+                </a:solidFill>
+                <a:latin typeface="맑은 고딕"/>
+              </a:rPr>
+              <a:t>G(k)=D(k)F(k) 가 주파수를 안 섞으니 65,536차원 문제가 아니라 1차원 문제 65,536개다. 각각 닫힌 해가 있어 반복도 학습률도 없다.</a:t>
+            </a:r>
+          </a:p>
+        </p:txBody>
+      </p:sp>
+      <p:sp>
+        <p:nvSpPr>
+          <p:cNvPr id="13" name="TextBox 12"/>
+          <p:cNvSpPr txBox="1"/>
+          <p:nvPr/>
+        </p:nvSpPr>
+        <p:spPr>
+          <a:xfrm>
+            <a:off x="640080" y="6355080"/>
+            <a:ext cx="10972800" cy="274320"/>
+          </a:xfrm>
+          <a:prstGeom prst="rect">
+            <a:avLst/>
+          </a:prstGeom>
+          <a:noFill/>
+        </p:spPr>
+        <p:txBody>
+          <a:bodyPr wrap="square" anchor="t">
+            <a:spAutoFit/>
+          </a:bodyPr>
+          <a:lstStyle/>
+          <a:p>
+            <a:pPr algn="l">
+              <a:lnSpc>
+                <a:spcPct val="125000"/>
+              </a:lnSpc>
+            </a:pPr>
+            <a:r>
+              <a:rPr sz="1000" b="0">
+                <a:solidFill>
+                  <a:srgbClr val="66756F"/>
+                </a:solidFill>
+                <a:latin typeface="Consolas"/>
+              </a:rPr>
+              <a:t>모델 선택보다 문제 구조 파악이 먼저다 — 파라미터 65,536개 선형 모델이 84만 U-Net 을 83 dB 앞선다</a:t>
+            </a:r>
+          </a:p>
+        </p:txBody>
+      </p:sp>
+    </p:spTree>
+  </p:cSld>
+  <p:clrMapOvr>
+    <a:masterClrMapping/>
+  </p:clrMapOvr>
+</p:sld>
+</file>
+
+<file path=ppt/slides/slide7.xml><?xml version="1.0" encoding="utf-8"?>
+<p:sld xmlns:a="http://schemas.openxmlformats.org/drawingml/2006/main" xmlns:p="http://schemas.openxmlformats.org/presentationml/2006/main" xmlns:r="http://schemas.openxmlformats.org/officeDocument/2006/relationships">
+  <p:cSld>
+    <p:bg>
+      <p:bgPr>
+        <a:solidFill>
+          <a:srgbClr val="FFFFFF"/>
+        </a:solidFill>
+        <a:effectLst/>
+      </p:bgPr>
+    </p:bg>
+    <p:spTree>
+      <p:nvGrpSpPr>
+        <p:cNvPr id="1" name=""/>
+        <p:cNvGrpSpPr/>
+        <p:nvPr/>
+      </p:nvGrpSpPr>
+      <p:grpSpPr/>
+      <p:sp>
+        <p:nvSpPr>
+          <p:cNvPr id="2" name="TextBox 1"/>
+          <p:cNvSpPr txBox="1"/>
+          <p:nvPr/>
+        </p:nvSpPr>
+        <p:spPr>
+          <a:xfrm>
+            <a:off x="640080" y="420624"/>
+            <a:ext cx="10972800" cy="274320"/>
+          </a:xfrm>
+          <a:prstGeom prst="rect">
+            <a:avLst/>
+          </a:prstGeom>
+          <a:noFill/>
+        </p:spPr>
+        <p:txBody>
+          <a:bodyPr wrap="square" anchor="t">
+            <a:spAutoFit/>
+          </a:bodyPr>
+          <a:lstStyle/>
+          <a:p>
+            <a:pPr algn="l">
+              <a:lnSpc>
+                <a:spcPct val="125000"/>
+              </a:lnSpc>
+            </a:pPr>
+            <a:r>
+              <a:rPr sz="1100" b="1">
+                <a:solidFill>
+                  <a:srgbClr val="0B6E5E"/>
+                </a:solidFill>
+                <a:latin typeface="Consolas"/>
+              </a:rPr>
+              <a:t>5 · CATEGORIES</a:t>
+            </a:r>
+          </a:p>
+        </p:txBody>
+      </p:sp>
+      <p:sp>
+        <p:nvSpPr>
+          <p:cNvPr id="3" name="TextBox 2"/>
+          <p:cNvSpPr txBox="1"/>
+          <p:nvPr/>
+        </p:nvSpPr>
+        <p:spPr>
+          <a:xfrm>
+            <a:off x="640080" y="713232"/>
+            <a:ext cx="10972800" cy="548640"/>
+          </a:xfrm>
+          <a:prstGeom prst="rect">
+            <a:avLst/>
+          </a:prstGeom>
+          <a:noFill/>
+        </p:spPr>
+        <p:txBody>
+          <a:bodyPr wrap="square" anchor="t">
+            <a:spAutoFit/>
+          </a:bodyPr>
+          <a:lstStyle/>
+          <a:p>
+            <a:pPr algn="l">
+              <a:lnSpc>
+                <a:spcPct val="125000"/>
+              </a:lnSpc>
+            </a:pPr>
+            <a:r>
+              <a:rPr sz="3000" b="1">
+                <a:solidFill>
+                  <a:srgbClr val="131A19"/>
+                </a:solidFill>
+                <a:latin typeface="맑은 고딕"/>
+              </a:rPr>
+              <a:t>무엇을 알아야 풀 수 있는가</a:t>
+            </a:r>
+          </a:p>
+        </p:txBody>
+      </p:sp>
+      <p:sp>
+        <p:nvSpPr>
+          <p:cNvPr id="4" name="TextBox 3"/>
+          <p:cNvSpPr txBox="1"/>
+          <p:nvPr/>
+        </p:nvSpPr>
+        <p:spPr>
+          <a:xfrm>
+            <a:off x="640080" y="1371600"/>
+            <a:ext cx="10972800" cy="365760"/>
+          </a:xfrm>
+          <a:prstGeom prst="rect">
+            <a:avLst/>
+          </a:prstGeom>
+          <a:noFill/>
+        </p:spPr>
+        <p:txBody>
+          <a:bodyPr wrap="square" anchor="t">
+            <a:spAutoFit/>
+          </a:bodyPr>
+          <a:lstStyle/>
+          <a:p>
+            <a:pPr algn="l">
+              <a:lnSpc>
+                <a:spcPct val="125000"/>
+              </a:lnSpc>
+            </a:pPr>
+            <a:r>
+              <a:rPr sz="1400" b="0">
+                <a:solidFill>
+                  <a:srgbClr val="66756F"/>
+                </a:solidFill>
+                <a:latin typeface="맑은 고딕"/>
+              </a:rPr>
+              <a:t>같은 문제를 세 가지 조건에서 풀었다</a:t>
+            </a:r>
+          </a:p>
+        </p:txBody>
+      </p:sp>
+      <p:sp>
+        <p:nvSpPr>
+          <p:cNvPr id="5" name="Rectangle 4"/>
+          <p:cNvSpPr/>
+          <p:nvPr/>
+        </p:nvSpPr>
+        <p:spPr>
+          <a:xfrm>
+            <a:off x="640080" y="1874520"/>
+            <a:ext cx="10908792" cy="15240"/>
+          </a:xfrm>
+          <a:prstGeom prst="rect">
+            <a:avLst/>
+          </a:prstGeom>
+          <a:solidFill>
+            <a:srgbClr val="DCE3E0"/>
+          </a:solidFill>
+          <a:ln>
+            <a:noFill/>
+          </a:ln>
+          <a:effectLst/>
+        </p:spPr>
+        <p:style>
+          <a:lnRef idx="1">
+            <a:schemeClr val="accent1"/>
+          </a:lnRef>
+          <a:fillRef idx="3">
+            <a:schemeClr val="accent1"/>
+          </a:fillRef>
+          <a:effectRef idx="2">
+            <a:schemeClr val="accent1"/>
+          </a:effectRef>
+          <a:fontRef idx="minor">
+            <a:schemeClr val="lt1"/>
+          </a:fontRef>
+        </p:style>
+        <p:txBody>
+          <a:bodyPr rtlCol="0" anchor="ctr"/>
+          <a:lstStyle/>
+          <a:p>
+            <a:pPr algn="ctr"/>
+          </a:p>
+        </p:txBody>
+      </p:sp>
+      <p:graphicFrame>
+        <p:nvGraphicFramePr>
+          <p:cNvPr id="6" name="Table 5"/>
+          <p:cNvGraphicFramePr>
+            <a:graphicFrameLocks noGrp="1"/>
+          </p:cNvGraphicFramePr>
+          <p:nvPr/>
+        </p:nvGraphicFramePr>
+        <p:xfrm>
+          <a:off x="640080" y="2148840"/>
+          <a:ext cx="10881356" cy="1371600"/>
+        </p:xfrm>
+        <a:graphic>
+          <a:graphicData uri="http://schemas.openxmlformats.org/drawingml/2006/table">
+            <a:tbl>
+              <a:tblPr firstRow="1" bandRow="1">
+                <a:tableStyleId>{5C22544A-7EE6-4342-B048-85BDC9FD1C3A}</a:tableStyleId>
+              </a:tblPr>
+              <a:tblGrid>
+                <a:gridCol w="1962212"/>
+                <a:gridCol w="3300084"/>
+                <a:gridCol w="1159489"/>
+                <a:gridCol w="1070297"/>
+                <a:gridCol w="1248680"/>
+                <a:gridCol w="1070297"/>
+                <a:gridCol w="1070297"/>
+              </a:tblGrid>
+              <a:tr h="274320">
+                <a:tc>
+                  <a:txBody>
+                    <a:bodyPr/>
+                    <a:lstStyle/>
+                    <a:p>
+                      <a:pPr algn="l"/>
+                      <a:r>
+                        <a:rPr sz="1100" b="1">
+                          <a:solidFill>
+                            <a:srgbClr val="131A19"/>
+                          </a:solidFill>
+                          <a:latin typeface="맑은 고딕"/>
+                        </a:rPr>
+                        <a:t>분류</a:t>
+                      </a:r>
+                    </a:p>
+                  </a:txBody>
+                  <a:tcPr marL="82296" marR="82296" marT="27432" marB="27432" anchor="ctr">
+                    <a:solidFill>
+                      <a:srgbClr val="DCEDE8"/>
+                    </a:solidFill>
+                  </a:tcPr>
+                </a:tc>
+                <a:tc>
+                  <a:txBody>
+                    <a:bodyPr/>
+                    <a:lstStyle/>
+                    <a:p>
+                      <a:pPr algn="r"/>
+                      <a:r>
+                        <a:rPr sz="1100" b="1">
+                          <a:solidFill>
+                            <a:srgbClr val="131A19"/>
+                          </a:solidFill>
+                          <a:latin typeface="Consolas"/>
+                        </a:rPr>
+                        <a:t>방법</a:t>
+                      </a:r>
+                    </a:p>
+                  </a:txBody>
+                  <a:tcPr marL="82296" marR="82296" marT="27432" marB="27432" anchor="ctr">
+                    <a:solidFill>
+                      <a:srgbClr val="DCEDE8"/>
+                    </a:solidFill>
+                  </a:tcPr>
+                </a:tc>
+                <a:tc>
+                  <a:txBody>
+                    <a:bodyPr/>
+                    <a:lstStyle/>
+                    <a:p>
+                      <a:pPr algn="r"/>
+                      <a:r>
+                        <a:rPr sz="1100" b="1">
+                          <a:solidFill>
+                            <a:srgbClr val="131A19"/>
+                          </a:solidFill>
+                          <a:latin typeface="Consolas"/>
+                        </a:rPr>
+                        <a:t>clean 정답</a:t>
+                      </a:r>
+                    </a:p>
+                  </a:txBody>
+                  <a:tcPr marL="82296" marR="82296" marT="27432" marB="27432" anchor="ctr">
+                    <a:solidFill>
+                      <a:srgbClr val="DCEDE8"/>
+                    </a:solidFill>
+                  </a:tcPr>
+                </a:tc>
+                <a:tc>
+                  <a:txBody>
+                    <a:bodyPr/>
+                    <a:lstStyle/>
+                    <a:p>
+                      <a:pPr algn="r"/>
+                      <a:r>
+                        <a:rPr sz="1100" b="1">
+                          <a:solidFill>
+                            <a:srgbClr val="131A19"/>
+                          </a:solidFill>
+                          <a:latin typeface="Consolas"/>
+                        </a:rPr>
+                        <a:t>커널 D</a:t>
+                      </a:r>
+                    </a:p>
+                  </a:txBody>
+                  <a:tcPr marL="82296" marR="82296" marT="27432" marB="27432" anchor="ctr">
+                    <a:solidFill>
+                      <a:srgbClr val="DCEDE8"/>
+                    </a:solidFill>
+                  </a:tcPr>
+                </a:tc>
+                <a:tc>
+                  <a:txBody>
+                    <a:bodyPr/>
+                    <a:lstStyle/>
+                    <a:p>
+                      <a:pPr algn="r"/>
+                      <a:r>
+                        <a:rPr sz="1100" b="1">
+                          <a:solidFill>
+                            <a:srgbClr val="131A19"/>
+                          </a:solidFill>
+                          <a:latin typeface="Consolas"/>
+                        </a:rPr>
+                        <a:t>메타데이터</a:t>
+                      </a:r>
+                    </a:p>
+                  </a:txBody>
+                  <a:tcPr marL="82296" marR="82296" marT="27432" marB="27432" anchor="ctr">
+                    <a:solidFill>
+                      <a:srgbClr val="DCEDE8"/>
+                    </a:solidFill>
+                  </a:tcPr>
+                </a:tc>
+                <a:tc>
+                  <a:txBody>
+                    <a:bodyPr/>
+                    <a:lstStyle/>
+                    <a:p>
+                      <a:pPr algn="r"/>
+                      <a:r>
+                        <a:rPr sz="1100" b="1">
+                          <a:solidFill>
+                            <a:srgbClr val="131A19"/>
+                          </a:solidFill>
+                          <a:latin typeface="Consolas"/>
+                        </a:rPr>
+                        <a:t>PSNR</a:t>
+                      </a:r>
+                    </a:p>
+                  </a:txBody>
+                  <a:tcPr marL="82296" marR="82296" marT="27432" marB="27432" anchor="ctr">
+                    <a:solidFill>
+                      <a:srgbClr val="DCEDE8"/>
+                    </a:solidFill>
+                  </a:tcPr>
+                </a:tc>
+                <a:tc>
+                  <a:txBody>
+                    <a:bodyPr/>
+                    <a:lstStyle/>
+                    <a:p>
+                      <a:pPr algn="r"/>
+                      <a:r>
+                        <a:rPr sz="1100" b="1">
+                          <a:solidFill>
+                            <a:srgbClr val="131A19"/>
+                          </a:solidFill>
+                          <a:latin typeface="Consolas"/>
+                        </a:rPr>
+                        <a:t>SSIM</a:t>
+                      </a:r>
+                    </a:p>
+                  </a:txBody>
+                  <a:tcPr marL="82296" marR="82296" marT="27432" marB="27432" anchor="ctr">
+                    <a:solidFill>
+                      <a:srgbClr val="DCEDE8"/>
+                    </a:solidFill>
+                  </a:tcPr>
+                </a:tc>
+              </a:tr>
+              <a:tr h="274320">
+                <a:tc>
+                  <a:txBody>
+                    <a:bodyPr/>
+                    <a:lstStyle/>
+                    <a:p>
+                      <a:pPr algn="l"/>
+                      <a:r>
+                        <a:rPr sz="1100" b="1">
+                          <a:solidFill>
+                            <a:srgbClr val="131A19"/>
+                          </a:solidFill>
+                          <a:latin typeface="맑은 고딕"/>
+                        </a:rPr>
+                        <a:t>Others</a:t>
+                      </a:r>
+                    </a:p>
+                  </a:txBody>
+                  <a:tcPr marL="82296" marR="82296" marT="27432" marB="27432" anchor="ctr">
+                    <a:solidFill>
+                      <a:srgbClr val="ECF5F2"/>
+                    </a:solidFill>
+                  </a:tcPr>
+                </a:tc>
+                <a:tc>
+                  <a:txBody>
+                    <a:bodyPr/>
+                    <a:lstStyle/>
+                    <a:p>
+                      <a:pPr algn="r"/>
+                      <a:r>
+                        <a:rPr sz="1100" b="1">
+                          <a:solidFill>
+                            <a:srgbClr val="131A19"/>
+                          </a:solidFill>
+                          <a:latin typeface="Consolas"/>
+                        </a:rPr>
+                        <a:t>Wiener K→0 + 메타 방향</a:t>
+                      </a:r>
+                    </a:p>
+                  </a:txBody>
+                  <a:tcPr marL="82296" marR="82296" marT="27432" marB="27432" anchor="ctr">
+                    <a:solidFill>
+                      <a:srgbClr val="ECF5F2"/>
+                    </a:solidFill>
+                  </a:tcPr>
+                </a:tc>
+                <a:tc>
+                  <a:txBody>
+                    <a:bodyPr/>
+                    <a:lstStyle/>
+                    <a:p>
+                      <a:pPr algn="r"/>
+                      <a:r>
+                        <a:rPr sz="1100" b="1">
+                          <a:solidFill>
+                            <a:srgbClr val="131A19"/>
+                          </a:solidFill>
+                          <a:latin typeface="Consolas"/>
+                        </a:rPr>
+                        <a:t>안 씀</a:t>
+                      </a:r>
+                    </a:p>
+                  </a:txBody>
+                  <a:tcPr marL="82296" marR="82296" marT="27432" marB="27432" anchor="ctr">
+                    <a:solidFill>
+                      <a:srgbClr val="ECF5F2"/>
+                    </a:solidFill>
+                  </a:tcPr>
+                </a:tc>
+                <a:tc>
+                  <a:txBody>
+                    <a:bodyPr/>
+                    <a:lstStyle/>
+                    <a:p>
+                      <a:pPr algn="r"/>
+                      <a:r>
+                        <a:rPr sz="1100" b="1">
+                          <a:solidFill>
+                            <a:srgbClr val="131A19"/>
+                          </a:solidFill>
+                          <a:latin typeface="Consolas"/>
+                        </a:rPr>
+                        <a:t>사용</a:t>
+                      </a:r>
+                    </a:p>
+                  </a:txBody>
+                  <a:tcPr marL="82296" marR="82296" marT="27432" marB="27432" anchor="ctr">
+                    <a:solidFill>
+                      <a:srgbClr val="ECF5F2"/>
+                    </a:solidFill>
+                  </a:tcPr>
+                </a:tc>
+                <a:tc>
+                  <a:txBody>
+                    <a:bodyPr/>
+                    <a:lstStyle/>
+                    <a:p>
+                      <a:pPr algn="r"/>
+                      <a:r>
+                        <a:rPr sz="1100" b="1">
+                          <a:solidFill>
+                            <a:srgbClr val="131A19"/>
+                          </a:solidFill>
+                          <a:latin typeface="Consolas"/>
+                        </a:rPr>
+                        <a:t>사용</a:t>
+                      </a:r>
+                    </a:p>
+                  </a:txBody>
+                  <a:tcPr marL="82296" marR="82296" marT="27432" marB="27432" anchor="ctr">
+                    <a:solidFill>
+                      <a:srgbClr val="ECF5F2"/>
+                    </a:solidFill>
+                  </a:tcPr>
+                </a:tc>
+                <a:tc>
+                  <a:txBody>
+                    <a:bodyPr/>
+                    <a:lstStyle/>
+                    <a:p>
+                      <a:pPr algn="r"/>
+                      <a:r>
+                        <a:rPr sz="1100" b="1">
+                          <a:solidFill>
+                            <a:srgbClr val="131A19"/>
+                          </a:solidFill>
+                          <a:latin typeface="Consolas"/>
+                        </a:rPr>
+                        <a:t>109.86</a:t>
+                      </a:r>
+                    </a:p>
+                  </a:txBody>
+                  <a:tcPr marL="82296" marR="82296" marT="27432" marB="27432" anchor="ctr">
+                    <a:solidFill>
+                      <a:srgbClr val="ECF5F2"/>
+                    </a:solidFill>
+                  </a:tcPr>
+                </a:tc>
+                <a:tc>
+                  <a:txBody>
+                    <a:bodyPr/>
+                    <a:lstStyle/>
+                    <a:p>
+                      <a:pPr algn="r"/>
+                      <a:r>
+                        <a:rPr sz="1100" b="1">
+                          <a:solidFill>
+                            <a:srgbClr val="131A19"/>
+                          </a:solidFill>
+                          <a:latin typeface="Consolas"/>
+                        </a:rPr>
+                        <a:t>1.0000</a:t>
+                      </a:r>
+                    </a:p>
+                  </a:txBody>
+                  <a:tcPr marL="82296" marR="82296" marT="27432" marB="27432" anchor="ctr">
+                    <a:solidFill>
+                      <a:srgbClr val="ECF5F2"/>
+                    </a:solidFill>
+                  </a:tcPr>
+                </a:tc>
+              </a:tr>
+              <a:tr h="274320">
+                <a:tc>
+                  <a:txBody>
+                    <a:bodyPr/>
+                    <a:lstStyle/>
+                    <a:p>
+                      <a:pPr algn="l"/>
+                      <a:r>
+                        <a:rPr sz="1100" b="0">
+                          <a:solidFill>
+                            <a:srgbClr val="3C4947"/>
+                          </a:solidFill>
+                          <a:latin typeface="맑은 고딕"/>
+                        </a:rPr>
+                        <a:t>Supervised</a:t>
+                      </a:r>
+                    </a:p>
+                  </a:txBody>
+                  <a:tcPr marL="82296" marR="82296" marT="27432" marB="27432" anchor="ctr">
+                    <a:solidFill>
+                      <a:srgbClr val="FFFFFF"/>
+                    </a:solidFill>
+                  </a:tcPr>
+                </a:tc>
+                <a:tc>
+                  <a:txBody>
+                    <a:bodyPr/>
+                    <a:lstStyle/>
+                    <a:p>
+                      <a:pPr algn="r"/>
+                      <a:r>
+                        <a:rPr sz="1100" b="0">
+                          <a:solidFill>
+                            <a:srgbClr val="3C4947"/>
+                          </a:solidFill>
+                          <a:latin typeface="Consolas"/>
+                        </a:rPr>
+                        <a:t>학습된 역필터 (train 200장)</a:t>
+                      </a:r>
+                    </a:p>
+                  </a:txBody>
+                  <a:tcPr marL="82296" marR="82296" marT="27432" marB="27432" anchor="ctr">
+                    <a:solidFill>
+                      <a:srgbClr val="FFFFFF"/>
+                    </a:solidFill>
+                  </a:tcPr>
+                </a:tc>
+                <a:tc>
+                  <a:txBody>
+                    <a:bodyPr/>
+                    <a:lstStyle/>
+                    <a:p>
+                      <a:pPr algn="r"/>
+                      <a:r>
+                        <a:rPr sz="1100" b="0">
+                          <a:solidFill>
+                            <a:srgbClr val="3C4947"/>
+                          </a:solidFill>
+                          <a:latin typeface="Consolas"/>
+                        </a:rPr>
+                        <a:t>사용</a:t>
+                      </a:r>
+                    </a:p>
+                  </a:txBody>
+                  <a:tcPr marL="82296" marR="82296" marT="27432" marB="27432" anchor="ctr">
+                    <a:solidFill>
+                      <a:srgbClr val="FFFFFF"/>
+                    </a:solidFill>
+                  </a:tcPr>
+                </a:tc>
+                <a:tc>
+                  <a:txBody>
+                    <a:bodyPr/>
+                    <a:lstStyle/>
+                    <a:p>
+                      <a:pPr algn="r"/>
+                      <a:r>
+                        <a:rPr sz="1100" b="0">
+                          <a:solidFill>
+                            <a:srgbClr val="3C4947"/>
+                          </a:solidFill>
+                          <a:latin typeface="Consolas"/>
+                        </a:rPr>
+                        <a:t>안 씀</a:t>
+                      </a:r>
+                    </a:p>
+                  </a:txBody>
+                  <a:tcPr marL="82296" marR="82296" marT="27432" marB="27432" anchor="ctr">
+                    <a:solidFill>
+                      <a:srgbClr val="FFFFFF"/>
+                    </a:solidFill>
+                  </a:tcPr>
+                </a:tc>
+                <a:tc>
+                  <a:txBody>
+                    <a:bodyPr/>
+                    <a:lstStyle/>
+                    <a:p>
+                      <a:pPr algn="r"/>
+                      <a:r>
+                        <a:rPr sz="1100" b="0">
+                          <a:solidFill>
+                            <a:srgbClr val="3C4947"/>
+                          </a:solidFill>
+                          <a:latin typeface="Consolas"/>
+                        </a:rPr>
+                        <a:t>안 씀</a:t>
+                      </a:r>
+                    </a:p>
+                  </a:txBody>
+                  <a:tcPr marL="82296" marR="82296" marT="27432" marB="27432" anchor="ctr">
+                    <a:solidFill>
+                      <a:srgbClr val="FFFFFF"/>
+                    </a:solidFill>
+                  </a:tcPr>
+                </a:tc>
+                <a:tc>
+                  <a:txBody>
+                    <a:bodyPr/>
+                    <a:lstStyle/>
+                    <a:p>
+                      <a:pPr algn="r"/>
+                      <a:r>
+                        <a:rPr sz="1100" b="0">
+                          <a:solidFill>
+                            <a:srgbClr val="3C4947"/>
+                          </a:solidFill>
+                          <a:latin typeface="Consolas"/>
+                        </a:rPr>
+                        <a:t>108.62</a:t>
+                      </a:r>
+                    </a:p>
+                  </a:txBody>
+                  <a:tcPr marL="82296" marR="82296" marT="27432" marB="27432" anchor="ctr">
+                    <a:solidFill>
+                      <a:srgbClr val="FFFFFF"/>
+                    </a:solidFill>
+                  </a:tcPr>
+                </a:tc>
+                <a:tc>
+                  <a:txBody>
+                    <a:bodyPr/>
+                    <a:lstStyle/>
+                    <a:p>
+                      <a:pPr algn="r"/>
+                      <a:r>
+                        <a:rPr sz="1100" b="0">
+                          <a:solidFill>
+                            <a:srgbClr val="3C4947"/>
+                          </a:solidFill>
+                          <a:latin typeface="Consolas"/>
+                        </a:rPr>
+                        <a:t>1.0000</a:t>
+                      </a:r>
+                    </a:p>
+                  </a:txBody>
+                  <a:tcPr marL="82296" marR="82296" marT="27432" marB="27432" anchor="ctr">
+                    <a:solidFill>
+                      <a:srgbClr val="FFFFFF"/>
+                    </a:solidFill>
+                  </a:tcPr>
+                </a:tc>
+              </a:tr>
+              <a:tr h="274320">
+                <a:tc>
+                  <a:txBody>
+                    <a:bodyPr/>
+                    <a:lstStyle/>
+                    <a:p>
+                      <a:pPr algn="l"/>
+                      <a:r>
+                        <a:rPr sz="1100" b="0">
+                          <a:solidFill>
+                            <a:srgbClr val="3C4947"/>
+                          </a:solidFill>
+                          <a:latin typeface="맑은 고딕"/>
+                        </a:rPr>
+                        <a:t>Self-supervised</a:t>
+                      </a:r>
+                    </a:p>
+                  </a:txBody>
+                  <a:tcPr marL="82296" marR="82296" marT="27432" marB="27432" anchor="ctr">
+                    <a:solidFill>
+                      <a:srgbClr val="FFFFFF"/>
+                    </a:solidFill>
+                  </a:tcPr>
+                </a:tc>
+                <a:tc>
+                  <a:txBody>
+                    <a:bodyPr/>
+                    <a:lstStyle/>
+                    <a:p>
+                      <a:pPr algn="r"/>
+                      <a:r>
+                        <a:rPr sz="1100" b="0">
+                          <a:solidFill>
+                            <a:srgbClr val="3C4947"/>
+                          </a:solidFill>
+                          <a:latin typeface="Consolas"/>
+                        </a:rPr>
+                        <a:t>방향 추정 + Wiener K=1e-5</a:t>
+                      </a:r>
+                    </a:p>
+                  </a:txBody>
+                  <a:tcPr marL="82296" marR="82296" marT="27432" marB="27432" anchor="ctr">
+                    <a:solidFill>
+                      <a:srgbClr val="FFFFFF"/>
+                    </a:solidFill>
+                  </a:tcPr>
+                </a:tc>
+                <a:tc>
+                  <a:txBody>
+                    <a:bodyPr/>
+                    <a:lstStyle/>
+                    <a:p>
+                      <a:pPr algn="r"/>
+                      <a:r>
+                        <a:rPr sz="1100" b="0">
+                          <a:solidFill>
+                            <a:srgbClr val="3C4947"/>
+                          </a:solidFill>
+                          <a:latin typeface="Consolas"/>
+                        </a:rPr>
+                        <a:t>안 씀</a:t>
+                      </a:r>
+                    </a:p>
+                  </a:txBody>
+                  <a:tcPr marL="82296" marR="82296" marT="27432" marB="27432" anchor="ctr">
+                    <a:solidFill>
+                      <a:srgbClr val="FFFFFF"/>
+                    </a:solidFill>
+                  </a:tcPr>
+                </a:tc>
+                <a:tc>
+                  <a:txBody>
+                    <a:bodyPr/>
+                    <a:lstStyle/>
+                    <a:p>
+                      <a:pPr algn="r"/>
+                      <a:r>
+                        <a:rPr sz="1100" b="0">
+                          <a:solidFill>
+                            <a:srgbClr val="3C4947"/>
+                          </a:solidFill>
+                          <a:latin typeface="Consolas"/>
+                        </a:rPr>
+                        <a:t>형태만</a:t>
+                      </a:r>
+                    </a:p>
+                  </a:txBody>
+                  <a:tcPr marL="82296" marR="82296" marT="27432" marB="27432" anchor="ctr">
+                    <a:solidFill>
+                      <a:srgbClr val="FFFFFF"/>
+                    </a:solidFill>
+                  </a:tcPr>
+                </a:tc>
+                <a:tc>
+                  <a:txBody>
+                    <a:bodyPr/>
+                    <a:lstStyle/>
+                    <a:p>
+                      <a:pPr algn="r"/>
+                      <a:r>
+                        <a:rPr sz="1100" b="0">
+                          <a:solidFill>
+                            <a:srgbClr val="3C4947"/>
+                          </a:solidFill>
+                          <a:latin typeface="Consolas"/>
+                        </a:rPr>
+                        <a:t>안 씀</a:t>
+                      </a:r>
+                    </a:p>
+                  </a:txBody>
+                  <a:tcPr marL="82296" marR="82296" marT="27432" marB="27432" anchor="ctr">
+                    <a:solidFill>
+                      <a:srgbClr val="FFFFFF"/>
+                    </a:solidFill>
+                  </a:tcPr>
+                </a:tc>
+                <a:tc>
+                  <a:txBody>
+                    <a:bodyPr/>
+                    <a:lstStyle/>
+                    <a:p>
+                      <a:pPr algn="r"/>
+                      <a:r>
+                        <a:rPr sz="1100" b="0">
+                          <a:solidFill>
+                            <a:srgbClr val="3C4947"/>
+                          </a:solidFill>
+                          <a:latin typeface="Consolas"/>
+                        </a:rPr>
+                        <a:t>44.30</a:t>
+                      </a:r>
+                    </a:p>
+                  </a:txBody>
+                  <a:tcPr marL="82296" marR="82296" marT="27432" marB="27432" anchor="ctr">
+                    <a:solidFill>
+                      <a:srgbClr val="FFFFFF"/>
+                    </a:solidFill>
+                  </a:tcPr>
+                </a:tc>
+                <a:tc>
+                  <a:txBody>
+                    <a:bodyPr/>
+                    <a:lstStyle/>
+                    <a:p>
+                      <a:pPr algn="r"/>
+                      <a:r>
+                        <a:rPr sz="1100" b="0">
+                          <a:solidFill>
+                            <a:srgbClr val="3C4947"/>
+                          </a:solidFill>
+                          <a:latin typeface="Consolas"/>
+                        </a:rPr>
+                        <a:t>0.9907</a:t>
+                      </a:r>
+                    </a:p>
+                  </a:txBody>
+                  <a:tcPr marL="82296" marR="82296" marT="27432" marB="27432" anchor="ctr">
+                    <a:solidFill>
+                      <a:srgbClr val="FFFFFF"/>
+                    </a:solidFill>
+                  </a:tcPr>
+                </a:tc>
+              </a:tr>
+              <a:tr h="274320">
+                <a:tc>
+                  <a:txBody>
+                    <a:bodyPr/>
+                    <a:lstStyle/>
+                    <a:p>
+                      <a:pPr algn="l"/>
+                      <a:r>
+                        <a:rPr sz="1100" b="0">
+                          <a:solidFill>
+                            <a:srgbClr val="3C4947"/>
+                          </a:solidFill>
+                          <a:latin typeface="맑은 고딕"/>
+                        </a:rPr>
+                        <a:t>Multi-orientation</a:t>
+                      </a:r>
+                    </a:p>
+                  </a:txBody>
+                  <a:tcPr marL="82296" marR="82296" marT="27432" marB="27432" anchor="ctr">
+                    <a:solidFill>
+                      <a:srgbClr val="FFFFFF"/>
+                    </a:solidFill>
+                  </a:tcPr>
+                </a:tc>
+                <a:tc>
+                  <a:txBody>
+                    <a:bodyPr/>
+                    <a:lstStyle/>
+                    <a:p>
+                      <a:pPr algn="r"/>
+                      <a:r>
+                        <a:rPr sz="1100" b="0">
+                          <a:solidFill>
+                            <a:srgbClr val="3C4947"/>
+                          </a:solidFill>
+                          <a:latin typeface="Consolas"/>
+                        </a:rPr>
+                        <a:t>해당 없음 — 아래 참고</a:t>
+                      </a:r>
+                    </a:p>
+                  </a:txBody>
+                  <a:tcPr marL="82296" marR="82296" marT="27432" marB="27432" anchor="ctr">
+                    <a:solidFill>
+                      <a:srgbClr val="FFFFFF"/>
+                    </a:solidFill>
+                  </a:tcPr>
+                </a:tc>
+                <a:tc>
+                  <a:txBody>
+                    <a:bodyPr/>
+                    <a:lstStyle/>
+                    <a:p>
+                      <a:pPr algn="r"/>
+                      <a:r>
+                        <a:rPr sz="1100" b="0">
+                          <a:solidFill>
+                            <a:srgbClr val="3C4947"/>
+                          </a:solidFill>
+                          <a:latin typeface="Consolas"/>
+                        </a:rPr>
+                        <a:t>—</a:t>
+                      </a:r>
+                    </a:p>
+                  </a:txBody>
+                  <a:tcPr marL="82296" marR="82296" marT="27432" marB="27432" anchor="ctr">
+                    <a:solidFill>
+                      <a:srgbClr val="FFFFFF"/>
+                    </a:solidFill>
+                  </a:tcPr>
+                </a:tc>
+                <a:tc>
+                  <a:txBody>
+                    <a:bodyPr/>
+                    <a:lstStyle/>
+                    <a:p>
+                      <a:pPr algn="r"/>
+                      <a:r>
+                        <a:rPr sz="1100" b="0">
+                          <a:solidFill>
+                            <a:srgbClr val="3C4947"/>
+                          </a:solidFill>
+                          <a:latin typeface="Consolas"/>
+                        </a:rPr>
+                        <a:t>—</a:t>
+                      </a:r>
+                    </a:p>
+                  </a:txBody>
+                  <a:tcPr marL="82296" marR="82296" marT="27432" marB="27432" anchor="ctr">
+                    <a:solidFill>
+                      <a:srgbClr val="FFFFFF"/>
+                    </a:solidFill>
+                  </a:tcPr>
+                </a:tc>
+                <a:tc>
+                  <a:txBody>
+                    <a:bodyPr/>
+                    <a:lstStyle/>
+                    <a:p>
+                      <a:pPr algn="r"/>
+                      <a:r>
+                        <a:rPr sz="1100" b="0">
+                          <a:solidFill>
+                            <a:srgbClr val="3C4947"/>
+                          </a:solidFill>
+                          <a:latin typeface="Consolas"/>
+                        </a:rPr>
+                        <a:t>—</a:t>
+                      </a:r>
+                    </a:p>
+                  </a:txBody>
+                  <a:tcPr marL="82296" marR="82296" marT="27432" marB="27432" anchor="ctr">
+                    <a:solidFill>
+                      <a:srgbClr val="FFFFFF"/>
+                    </a:solidFill>
+                  </a:tcPr>
+                </a:tc>
+                <a:tc>
+                  <a:txBody>
+                    <a:bodyPr/>
+                    <a:lstStyle/>
+                    <a:p>
+                      <a:pPr algn="r"/>
+                      <a:r>
+                        <a:rPr sz="1100" b="0">
+                          <a:solidFill>
+                            <a:srgbClr val="3C4947"/>
+                          </a:solidFill>
+                          <a:latin typeface="Consolas"/>
+                        </a:rPr>
+                        <a:t>—</a:t>
+                      </a:r>
+                    </a:p>
+                  </a:txBody>
+                  <a:tcPr marL="82296" marR="82296" marT="27432" marB="27432" anchor="ctr">
+                    <a:solidFill>
+                      <a:srgbClr val="FFFFFF"/>
+                    </a:solidFill>
+                  </a:tcPr>
+                </a:tc>
+                <a:tc>
+                  <a:txBody>
+                    <a:bodyPr/>
+                    <a:lstStyle/>
+                    <a:p>
+                      <a:pPr algn="r"/>
+                      <a:r>
+                        <a:rPr sz="1100" b="0">
+                          <a:solidFill>
+                            <a:srgbClr val="3C4947"/>
+                          </a:solidFill>
+                          <a:latin typeface="Consolas"/>
+                        </a:rPr>
+                        <a:t>—</a:t>
+                      </a:r>
+                    </a:p>
+                  </a:txBody>
+                  <a:tcPr marL="82296" marR="82296" marT="27432" marB="27432" anchor="ctr">
+                    <a:solidFill>
+                      <a:srgbClr val="FFFFFF"/>
+                    </a:solidFill>
+                  </a:tcPr>
+                </a:tc>
+              </a:tr>
+            </a:tbl>
+          </a:graphicData>
+        </a:graphic>
+      </p:graphicFrame>
+      <p:sp>
+        <p:nvSpPr>
+          <p:cNvPr id="7" name="Rounded Rectangle 6"/>
+          <p:cNvSpPr/>
+          <p:nvPr/>
+        </p:nvSpPr>
+        <p:spPr>
+          <a:xfrm>
+            <a:off x="640080" y="3931920"/>
+            <a:ext cx="5303520" cy="2011680"/>
+          </a:xfrm>
+          <a:prstGeom prst="roundRect">
+            <a:avLst>
+              <a:gd name="adj" fmla="val 4000"/>
+            </a:avLst>
+          </a:prstGeom>
+          <a:solidFill>
+            <a:srgbClr val="DCEDE8"/>
+          </a:solidFill>
+          <a:ln w="9525">
+            <a:solidFill>
+              <a:srgbClr val="0B6E5E"/>
+            </a:solidFill>
+          </a:ln>
+          <a:effectLst/>
+        </p:spPr>
+        <p:style>
+          <a:lnRef idx="1">
+            <a:schemeClr val="accent1"/>
+          </a:lnRef>
+          <a:fillRef idx="3">
+            <a:schemeClr val="accent1"/>
+          </a:fillRef>
+          <a:effectRef idx="2">
+            <a:schemeClr val="accent1"/>
+          </a:effectRef>
+          <a:fontRef idx="minor">
+            <a:schemeClr val="lt1"/>
+          </a:fontRef>
+        </p:style>
+        <p:txBody>
+          <a:bodyPr rtlCol="0" anchor="ctr"/>
+          <a:lstStyle/>
+          <a:p>
+            <a:pPr algn="ctr"/>
+          </a:p>
+        </p:txBody>
+      </p:sp>
+      <p:sp>
+        <p:nvSpPr>
+          <p:cNvPr id="8" name="TextBox 7"/>
+          <p:cNvSpPr txBox="1"/>
+          <p:nvPr/>
+        </p:nvSpPr>
+        <p:spPr>
+          <a:xfrm>
+            <a:off x="868680" y="4096512"/>
+            <a:ext cx="4846320" cy="1737360"/>
+          </a:xfrm>
+          <a:prstGeom prst="rect">
+            <a:avLst/>
+          </a:prstGeom>
+          <a:noFill/>
+        </p:spPr>
+        <p:txBody>
+          <a:bodyPr wrap="square" anchor="t">
+            <a:spAutoFit/>
+          </a:bodyPr>
+          <a:lstStyle/>
+          <a:p>
+            <a:pPr algn="l">
+              <a:lnSpc>
+                <a:spcPct val="125000"/>
+              </a:lnSpc>
+            </a:pPr>
+            <a:r>
+              <a:rPr sz="1500" b="1">
+                <a:solidFill>
+                  <a:srgbClr val="131A19"/>
+                </a:solidFill>
+                <a:latin typeface="맑은 고딕"/>
+              </a:rPr>
+              <a:t>Self-supervised 가 가장 적게 요구한다</a:t>
+            </a:r>
+          </a:p>
+          <a:p>
+            <a:pPr algn="l">
+              <a:lnSpc>
+                <a:spcPct val="125000"/>
+              </a:lnSpc>
+              <a:spcBef>
+                <a:spcPts val="800"/>
+              </a:spcBef>
+            </a:pPr>
+            <a:r>
+              <a:rPr sz="1250" b="0">
+                <a:solidFill>
+                  <a:srgbClr val="3C4947"/>
+                </a:solidFill>
+                <a:latin typeface="맑은 고딕"/>
+              </a:rPr>
+              <a:t>정답도 방향도 받지 않는다. dipole 커널의 형태(각도가 미지수인 족)만 알고, 그 각도를 측정치 스펙트럼에서 찾는다 — 평균 오차 0.198°.</a:t>
+            </a:r>
+          </a:p>
+          <a:p>
+            <a:pPr algn="l">
+              <a:lnSpc>
+                <a:spcPct val="125000"/>
+              </a:lnSpc>
+              <a:spcBef>
+                <a:spcPts val="500"/>
+              </a:spcBef>
+            </a:pPr>
+            <a:r>
+              <a:rPr sz="1250" b="0">
+                <a:solidFill>
+                  <a:srgbClr val="3C4947"/>
+                </a:solidFill>
+                <a:latin typeface="맑은 고딕"/>
+              </a:rPr>
+              <a:t>44.30 에 그치는 건 방향 오차 때문이다. K 를 키워 그 오차를 흡수하는 지점(1e-5)에서 최댓값이 생긴다 — 노이즈일 때와 같은 구조다.</a:t>
+            </a:r>
+          </a:p>
+        </p:txBody>
+      </p:sp>
+      <p:sp>
+        <p:nvSpPr>
+          <p:cNvPr id="9" name="Rounded Rectangle 8"/>
+          <p:cNvSpPr/>
+          <p:nvPr/>
+        </p:nvSpPr>
+        <p:spPr>
+          <a:xfrm>
+            <a:off x="6217920" y="3931920"/>
+            <a:ext cx="5303520" cy="2011680"/>
+          </a:xfrm>
+          <a:prstGeom prst="roundRect">
+            <a:avLst>
+              <a:gd name="adj" fmla="val 4000"/>
+            </a:avLst>
+          </a:prstGeom>
+          <a:solidFill>
+            <a:srgbClr val="F3F6F5"/>
+          </a:solidFill>
+          <a:ln w="9525">
+            <a:solidFill>
+              <a:srgbClr val="DCE3E0"/>
+            </a:solidFill>
+          </a:ln>
+          <a:effectLst/>
+        </p:spPr>
+        <p:style>
+          <a:lnRef idx="1">
+            <a:schemeClr val="accent1"/>
+          </a:lnRef>
+          <a:fillRef idx="3">
+            <a:schemeClr val="accent1"/>
+          </a:fillRef>
+          <a:effectRef idx="2">
+            <a:schemeClr val="accent1"/>
+          </a:effectRef>
+          <a:fontRef idx="minor">
+            <a:schemeClr val="lt1"/>
+          </a:fontRef>
+        </p:style>
+        <p:txBody>
+          <a:bodyPr rtlCol="0" anchor="ctr"/>
+          <a:lstStyle/>
+          <a:p>
+            <a:pPr algn="ctr"/>
+          </a:p>
+        </p:txBody>
+      </p:sp>
+      <p:sp>
+        <p:nvSpPr>
+          <p:cNvPr id="10" name="TextBox 9"/>
+          <p:cNvSpPr txBox="1"/>
+          <p:nvPr/>
+        </p:nvSpPr>
+        <p:spPr>
+          <a:xfrm>
+            <a:off x="6446520" y="4096512"/>
+            <a:ext cx="4846320" cy="1737360"/>
+          </a:xfrm>
+          <a:prstGeom prst="rect">
+            <a:avLst/>
+          </a:prstGeom>
+          <a:noFill/>
+        </p:spPr>
+        <p:txBody>
+          <a:bodyPr wrap="square" anchor="t">
+            <a:spAutoFit/>
+          </a:bodyPr>
+          <a:lstStyle/>
+          <a:p>
+            <a:pPr algn="l">
+              <a:lnSpc>
+                <a:spcPct val="125000"/>
+              </a:lnSpc>
+            </a:pPr>
+            <a:r>
+              <a:rPr sz="1500" b="1">
+                <a:solidFill>
+                  <a:srgbClr val="131A19"/>
+                </a:solidFill>
+                <a:latin typeface="맑은 고딕"/>
+              </a:rPr>
+              <a:t>Multi-orientation 은 이 과제에 없다</a:t>
+            </a:r>
+          </a:p>
+          <a:p>
+            <a:pPr algn="l">
+              <a:lnSpc>
+                <a:spcPct val="125000"/>
+              </a:lnSpc>
+              <a:spcBef>
+                <a:spcPts val="800"/>
+              </a:spcBef>
+            </a:pPr>
+            <a:r>
+              <a:rPr sz="1250" b="0">
+                <a:solidFill>
+                  <a:srgbClr val="3C4947"/>
+                </a:solidFill>
+                <a:latin typeface="맑은 고딕"/>
+              </a:rPr>
+              <a:t>test_deconv_multi 는 이름과 달리 COSMOS 가 아니다. 0/45/90/135° 폴더끼리 이미지가 하나도 겹치지 않는다 — 같은 장면을 여러 방향으로 찍은 게 아니라 이미지마다 방향이 다른 것이다.</a:t>
+            </a:r>
+          </a:p>
+          <a:p>
+            <a:pPr algn="l">
+              <a:lnSpc>
+                <a:spcPct val="125000"/>
+              </a:lnSpc>
+              <a:spcBef>
+                <a:spcPts val="500"/>
+              </a:spcBef>
+            </a:pPr>
+            <a:r>
+              <a:rPr sz="1250" b="0">
+                <a:solidFill>
+                  <a:srgbClr val="3C4947"/>
+                </a:solidFill>
+                <a:latin typeface="맑은 고딕"/>
+              </a:rPr>
+              <a:t>여러 방향을 합쳐 0 영역을 메우는 건 배포 데이터로는 불가능하다.</a:t>
+            </a:r>
+          </a:p>
+        </p:txBody>
+      </p:sp>
+      <p:sp>
+        <p:nvSpPr>
+          <p:cNvPr id="11" name="TextBox 10"/>
+          <p:cNvSpPr txBox="1"/>
+          <p:nvPr/>
+        </p:nvSpPr>
+        <p:spPr>
+          <a:xfrm>
+            <a:off x="640080" y="6355080"/>
+            <a:ext cx="10972800" cy="274320"/>
+          </a:xfrm>
+          <a:prstGeom prst="rect">
+            <a:avLst/>
+          </a:prstGeom>
+          <a:noFill/>
+        </p:spPr>
+        <p:txBody>
+          <a:bodyPr wrap="square" anchor="t">
+            <a:spAutoFit/>
+          </a:bodyPr>
+          <a:lstStyle/>
+          <a:p>
+            <a:pPr algn="l">
+              <a:lnSpc>
+                <a:spcPct val="125000"/>
+              </a:lnSpc>
+            </a:pPr>
+            <a:r>
+              <a:rPr sz="1000" b="0">
+                <a:solidFill>
+                  <a:srgbClr val="66756F"/>
+                </a:solidFill>
+                <a:latin typeface="Consolas"/>
+              </a:rPr>
+              <a:t>Self-supervised 도 배포 Wiener(42.25)와 배포 U-Net(25.59)은 넘는다</a:t>
+            </a:r>
+          </a:p>
+        </p:txBody>
+      </p:sp>
+    </p:spTree>
+  </p:cSld>
+  <p:clrMapOvr>
+    <a:masterClrMapping/>
+  </p:clrMapOvr>
+</p:sld>
+</file>
+
+<file path=ppt/slides/slide8.xml><?xml version="1.0" encoding="utf-8"?>
+<p:sld xmlns:a="http://schemas.openxmlformats.org/drawingml/2006/main" xmlns:p="http://schemas.openxmlformats.org/presentationml/2006/main" xmlns:r="http://schemas.openxmlformats.org/officeDocument/2006/relationships">
+  <p:cSld>
+    <p:bg>
+      <p:bgPr>
+        <a:solidFill>
+          <a:srgbClr val="FFFFFF"/>
+        </a:solidFill>
+        <a:effectLst/>
+      </p:bgPr>
+    </p:bg>
+    <p:spTree>
+      <p:nvGrpSpPr>
+        <p:cNvPr id="1" name=""/>
+        <p:cNvGrpSpPr/>
+        <p:nvPr/>
+      </p:nvGrpSpPr>
+      <p:grpSpPr/>
+      <p:sp>
+        <p:nvSpPr>
+          <p:cNvPr id="2" name="TextBox 1"/>
+          <p:cNvSpPr txBox="1"/>
+          <p:nvPr/>
+        </p:nvSpPr>
+        <p:spPr>
+          <a:xfrm>
+            <a:off x="640080" y="420624"/>
+            <a:ext cx="10972800" cy="274320"/>
+          </a:xfrm>
+          <a:prstGeom prst="rect">
+            <a:avLst/>
+          </a:prstGeom>
+          <a:noFill/>
+        </p:spPr>
+        <p:txBody>
+          <a:bodyPr wrap="square" anchor="t">
+            <a:spAutoFit/>
+          </a:bodyPr>
+          <a:lstStyle/>
+          <a:p>
+            <a:pPr algn="l">
+              <a:lnSpc>
+                <a:spcPct val="125000"/>
+              </a:lnSpc>
+            </a:pPr>
+            <a:r>
+              <a:rPr sz="1100" b="1">
+                <a:solidFill>
+                  <a:srgbClr val="0B6E5E"/>
+                </a:solidFill>
+                <a:latin typeface="Consolas"/>
+              </a:rPr>
               <a:t>RESULTS</a:t>
             </a:r>
           </a:p>
@@ -8351,7 +12281,7 @@
 </p:sld>
 </file>
 
-<file path=ppt/slides/slide7.xml><?xml version="1.0" encoding="utf-8"?>
+<file path=ppt/slides/slide9.xml><?xml version="1.0" encoding="utf-8"?>
 <p:sld xmlns:a="http://schemas.openxmlformats.org/drawingml/2006/main" xmlns:p="http://schemas.openxmlformats.org/presentationml/2006/main" xmlns:r="http://schemas.openxmlformats.org/officeDocument/2006/relationships">
   <p:cSld>
     <p:bg>
@@ -8589,1541 +12519,6 @@
                 <a:latin typeface="Consolas"/>
               </a:rPr>
               <a:t>1일차 입력 24.67 dB vs 2일차 입력 7.89 dB — 2일차가 훨씬 심하게 망가져 보이지만 정확히 가역이다</a:t>
-            </a:r>
-          </a:p>
-        </p:txBody>
-      </p:sp>
-    </p:spTree>
-  </p:cSld>
-  <p:clrMapOvr>
-    <a:masterClrMapping/>
-  </p:clrMapOvr>
-</p:sld>
-</file>
-
-<file path=ppt/slides/slide8.xml><?xml version="1.0" encoding="utf-8"?>
-<p:sld xmlns:a="http://schemas.openxmlformats.org/drawingml/2006/main" xmlns:p="http://schemas.openxmlformats.org/presentationml/2006/main" xmlns:r="http://schemas.openxmlformats.org/officeDocument/2006/relationships">
-  <p:cSld>
-    <p:bg>
-      <p:bgPr>
-        <a:solidFill>
-          <a:srgbClr val="FFFFFF"/>
-        </a:solidFill>
-        <a:effectLst/>
-      </p:bgPr>
-    </p:bg>
-    <p:spTree>
-      <p:nvGrpSpPr>
-        <p:cNvPr id="1" name=""/>
-        <p:cNvGrpSpPr/>
-        <p:nvPr/>
-      </p:nvGrpSpPr>
-      <p:grpSpPr/>
-      <p:sp>
-        <p:nvSpPr>
-          <p:cNvPr id="2" name="TextBox 1"/>
-          <p:cNvSpPr txBox="1"/>
-          <p:nvPr/>
-        </p:nvSpPr>
-        <p:spPr>
-          <a:xfrm>
-            <a:off x="640080" y="420624"/>
-            <a:ext cx="10972800" cy="274320"/>
-          </a:xfrm>
-          <a:prstGeom prst="rect">
-            <a:avLst/>
-          </a:prstGeom>
-          <a:noFill/>
-        </p:spPr>
-        <p:txBody>
-          <a:bodyPr wrap="square" anchor="t">
-            <a:spAutoFit/>
-          </a:bodyPr>
-          <a:lstStyle/>
-          <a:p>
-            <a:pPr algn="l">
-              <a:lnSpc>
-                <a:spcPct val="125000"/>
-              </a:lnSpc>
-            </a:pPr>
-            <a:r>
-              <a:rPr sz="1100" b="1">
-                <a:solidFill>
-                  <a:srgbClr val="0B6E5E"/>
-                </a:solidFill>
-                <a:latin typeface="Consolas"/>
-              </a:rPr>
-              <a:t>4 · KERNEL DIRECTION</a:t>
-            </a:r>
-          </a:p>
-        </p:txBody>
-      </p:sp>
-      <p:sp>
-        <p:nvSpPr>
-          <p:cNvPr id="3" name="TextBox 2"/>
-          <p:cNvSpPr txBox="1"/>
-          <p:nvPr/>
-        </p:nvSpPr>
-        <p:spPr>
-          <a:xfrm>
-            <a:off x="640080" y="713232"/>
-            <a:ext cx="10972800" cy="548640"/>
-          </a:xfrm>
-          <a:prstGeom prst="rect">
-            <a:avLst/>
-          </a:prstGeom>
-          <a:noFill/>
-        </p:spPr>
-        <p:txBody>
-          <a:bodyPr wrap="square" anchor="t">
-            <a:spAutoFit/>
-          </a:bodyPr>
-          <a:lstStyle/>
-          <a:p>
-            <a:pPr algn="l">
-              <a:lnSpc>
-                <a:spcPct val="125000"/>
-              </a:lnSpc>
-            </a:pPr>
-            <a:r>
-              <a:rPr sz="3000" b="1">
-                <a:solidFill>
-                  <a:srgbClr val="131A19"/>
-                </a:solidFill>
-                <a:latin typeface="맑은 고딕"/>
-              </a:rPr>
-              <a:t>test_deconv_multi — 커널 방향이 이미지마다 다르다</a:t>
-            </a:r>
-          </a:p>
-        </p:txBody>
-      </p:sp>
-      <p:sp>
-        <p:nvSpPr>
-          <p:cNvPr id="4" name="TextBox 3"/>
-          <p:cNvSpPr txBox="1"/>
-          <p:nvPr/>
-        </p:nvSpPr>
-        <p:spPr>
-          <a:xfrm>
-            <a:off x="640080" y="1371600"/>
-            <a:ext cx="10972800" cy="365760"/>
-          </a:xfrm>
-          <a:prstGeom prst="rect">
-            <a:avLst/>
-          </a:prstGeom>
-          <a:noFill/>
-        </p:spPr>
-        <p:txBody>
-          <a:bodyPr wrap="square" anchor="t">
-            <a:spAutoFit/>
-          </a:bodyPr>
-          <a:lstStyle/>
-          <a:p>
-            <a:pPr algn="l">
-              <a:lnSpc>
-                <a:spcPct val="125000"/>
-              </a:lnSpc>
-            </a:pPr>
-            <a:r>
-              <a:rPr sz="1400" b="0">
-                <a:solidFill>
-                  <a:srgbClr val="66756F"/>
-                </a:solidFill>
-                <a:latin typeface="맑은 고딕"/>
-              </a:rPr>
-              <a:t>0° / 45° / 90° / 135° 각 25장. 폴더끼리 이미지가 겹치지 않는다 (COSMOS 가 아니다)</a:t>
-            </a:r>
-          </a:p>
-        </p:txBody>
-      </p:sp>
-      <p:sp>
-        <p:nvSpPr>
-          <p:cNvPr id="5" name="Rectangle 4"/>
-          <p:cNvSpPr/>
-          <p:nvPr/>
-        </p:nvSpPr>
-        <p:spPr>
-          <a:xfrm>
-            <a:off x="640080" y="1874520"/>
-            <a:ext cx="10908792" cy="15240"/>
-          </a:xfrm>
-          <a:prstGeom prst="rect">
-            <a:avLst/>
-          </a:prstGeom>
-          <a:solidFill>
-            <a:srgbClr val="DCE3E0"/>
-          </a:solidFill>
-          <a:ln>
-            <a:noFill/>
-          </a:ln>
-          <a:effectLst/>
-        </p:spPr>
-        <p:style>
-          <a:lnRef idx="1">
-            <a:schemeClr val="accent1"/>
-          </a:lnRef>
-          <a:fillRef idx="3">
-            <a:schemeClr val="accent1"/>
-          </a:fillRef>
-          <a:effectRef idx="2">
-            <a:schemeClr val="accent1"/>
-          </a:effectRef>
-          <a:fontRef idx="minor">
-            <a:schemeClr val="lt1"/>
-          </a:fontRef>
-        </p:style>
-        <p:txBody>
-          <a:bodyPr rtlCol="0" anchor="ctr"/>
-          <a:lstStyle/>
-          <a:p>
-            <a:pPr algn="ctr"/>
-          </a:p>
-        </p:txBody>
-      </p:sp>
-      <p:graphicFrame>
-        <p:nvGraphicFramePr>
-          <p:cNvPr id="6" name="Table 5"/>
-          <p:cNvGraphicFramePr>
-            <a:graphicFrameLocks noGrp="1"/>
-          </p:cNvGraphicFramePr>
-          <p:nvPr/>
-        </p:nvGraphicFramePr>
-        <p:xfrm>
-          <a:off x="640080" y="2148840"/>
-          <a:ext cx="6035040" cy="1097280"/>
-        </p:xfrm>
-        <a:graphic>
-          <a:graphicData uri="http://schemas.openxmlformats.org/drawingml/2006/table">
-            <a:tbl>
-              <a:tblPr firstRow="1" bandRow="1">
-                <a:tableStyleId>{5C22544A-7EE6-4342-B048-85BDC9FD1C3A}</a:tableStyleId>
-              </a:tblPr>
-              <a:tblGrid>
-                <a:gridCol w="3291840"/>
-                <a:gridCol w="914400"/>
-                <a:gridCol w="914400"/>
-                <a:gridCol w="914400"/>
-              </a:tblGrid>
-              <a:tr h="274320">
-                <a:tc>
-                  <a:txBody>
-                    <a:bodyPr/>
-                    <a:lstStyle/>
-                    <a:p>
-                      <a:pPr algn="l"/>
-                      <a:r>
-                        <a:rPr sz="1200" b="1">
-                          <a:solidFill>
-                            <a:srgbClr val="131A19"/>
-                          </a:solidFill>
-                          <a:latin typeface="맑은 고딕"/>
-                        </a:rPr>
-                        <a:t>방향 정보</a:t>
-                      </a:r>
-                    </a:p>
-                  </a:txBody>
-                  <a:tcPr marL="82296" marR="82296" marT="27432" marB="27432" anchor="ctr">
-                    <a:solidFill>
-                      <a:srgbClr val="DCEDE8"/>
-                    </a:solidFill>
-                  </a:tcPr>
-                </a:tc>
-                <a:tc>
-                  <a:txBody>
-                    <a:bodyPr/>
-                    <a:lstStyle/>
-                    <a:p>
-                      <a:pPr algn="r"/>
-                      <a:r>
-                        <a:rPr sz="1200" b="1">
-                          <a:solidFill>
-                            <a:srgbClr val="131A19"/>
-                          </a:solidFill>
-                          <a:latin typeface="Consolas"/>
-                        </a:rPr>
-                        <a:t>K</a:t>
-                      </a:r>
-                    </a:p>
-                  </a:txBody>
-                  <a:tcPr marL="82296" marR="82296" marT="27432" marB="27432" anchor="ctr">
-                    <a:solidFill>
-                      <a:srgbClr val="DCEDE8"/>
-                    </a:solidFill>
-                  </a:tcPr>
-                </a:tc>
-                <a:tc>
-                  <a:txBody>
-                    <a:bodyPr/>
-                    <a:lstStyle/>
-                    <a:p>
-                      <a:pPr algn="r"/>
-                      <a:r>
-                        <a:rPr sz="1200" b="1">
-                          <a:solidFill>
-                            <a:srgbClr val="131A19"/>
-                          </a:solidFill>
-                          <a:latin typeface="Consolas"/>
-                        </a:rPr>
-                        <a:t>PSNR</a:t>
-                      </a:r>
-                    </a:p>
-                  </a:txBody>
-                  <a:tcPr marL="82296" marR="82296" marT="27432" marB="27432" anchor="ctr">
-                    <a:solidFill>
-                      <a:srgbClr val="DCEDE8"/>
-                    </a:solidFill>
-                  </a:tcPr>
-                </a:tc>
-                <a:tc>
-                  <a:txBody>
-                    <a:bodyPr/>
-                    <a:lstStyle/>
-                    <a:p>
-                      <a:pPr algn="r"/>
-                      <a:r>
-                        <a:rPr sz="1200" b="1">
-                          <a:solidFill>
-                            <a:srgbClr val="131A19"/>
-                          </a:solidFill>
-                          <a:latin typeface="Consolas"/>
-                        </a:rPr>
-                        <a:t>SSIM</a:t>
-                      </a:r>
-                    </a:p>
-                  </a:txBody>
-                  <a:tcPr marL="82296" marR="82296" marT="27432" marB="27432" anchor="ctr">
-                    <a:solidFill>
-                      <a:srgbClr val="DCEDE8"/>
-                    </a:solidFill>
-                  </a:tcPr>
-                </a:tc>
-              </a:tr>
-              <a:tr h="274320">
-                <a:tc>
-                  <a:txBody>
-                    <a:bodyPr/>
-                    <a:lstStyle/>
-                    <a:p>
-                      <a:pPr algn="l"/>
-                      <a:r>
-                        <a:rPr sz="1200" b="1">
-                          <a:solidFill>
-                            <a:srgbClr val="131A19"/>
-                          </a:solidFill>
-                          <a:latin typeface="맑은 고딕"/>
-                        </a:rPr>
-                        <a:t>메타데이터</a:t>
-                      </a:r>
-                    </a:p>
-                  </a:txBody>
-                  <a:tcPr marL="82296" marR="82296" marT="27432" marB="27432" anchor="ctr">
-                    <a:solidFill>
-                      <a:srgbClr val="ECF5F2"/>
-                    </a:solidFill>
-                  </a:tcPr>
-                </a:tc>
-                <a:tc>
-                  <a:txBody>
-                    <a:bodyPr/>
-                    <a:lstStyle/>
-                    <a:p>
-                      <a:pPr algn="r"/>
-                      <a:r>
-                        <a:rPr sz="1200" b="1">
-                          <a:solidFill>
-                            <a:srgbClr val="131A19"/>
-                          </a:solidFill>
-                          <a:latin typeface="Consolas"/>
-                        </a:rPr>
-                        <a:t>1e-6</a:t>
-                      </a:r>
-                    </a:p>
-                  </a:txBody>
-                  <a:tcPr marL="82296" marR="82296" marT="27432" marB="27432" anchor="ctr">
-                    <a:solidFill>
-                      <a:srgbClr val="ECF5F2"/>
-                    </a:solidFill>
-                  </a:tcPr>
-                </a:tc>
-                <a:tc>
-                  <a:txBody>
-                    <a:bodyPr/>
-                    <a:lstStyle/>
-                    <a:p>
-                      <a:pPr algn="r"/>
-                      <a:r>
-                        <a:rPr sz="1200" b="1">
-                          <a:solidFill>
-                            <a:srgbClr val="131A19"/>
-                          </a:solidFill>
-                          <a:latin typeface="Consolas"/>
-                        </a:rPr>
-                        <a:t>48.52</a:t>
-                      </a:r>
-                    </a:p>
-                  </a:txBody>
-                  <a:tcPr marL="82296" marR="82296" marT="27432" marB="27432" anchor="ctr">
-                    <a:solidFill>
-                      <a:srgbClr val="ECF5F2"/>
-                    </a:solidFill>
-                  </a:tcPr>
-                </a:tc>
-                <a:tc>
-                  <a:txBody>
-                    <a:bodyPr/>
-                    <a:lstStyle/>
-                    <a:p>
-                      <a:pPr algn="r"/>
-                      <a:r>
-                        <a:rPr sz="1200" b="1">
-                          <a:solidFill>
-                            <a:srgbClr val="131A19"/>
-                          </a:solidFill>
-                          <a:latin typeface="Consolas"/>
-                        </a:rPr>
-                        <a:t>0.9935</a:t>
-                      </a:r>
-                    </a:p>
-                  </a:txBody>
-                  <a:tcPr marL="82296" marR="82296" marT="27432" marB="27432" anchor="ctr">
-                    <a:solidFill>
-                      <a:srgbClr val="ECF5F2"/>
-                    </a:solidFill>
-                  </a:tcPr>
-                </a:tc>
-              </a:tr>
-              <a:tr h="274320">
-                <a:tc>
-                  <a:txBody>
-                    <a:bodyPr/>
-                    <a:lstStyle/>
-                    <a:p>
-                      <a:pPr algn="l"/>
-                      <a:r>
-                        <a:rPr sz="1200" b="0">
-                          <a:solidFill>
-                            <a:srgbClr val="3C4947"/>
-                          </a:solidFill>
-                          <a:latin typeface="맑은 고딕"/>
-                        </a:rPr>
-                        <a:t>측정치에서 추정 (평균 오차 0.19°)</a:t>
-                      </a:r>
-                    </a:p>
-                  </a:txBody>
-                  <a:tcPr marL="82296" marR="82296" marT="27432" marB="27432" anchor="ctr">
-                    <a:solidFill>
-                      <a:srgbClr val="FFFFFF"/>
-                    </a:solidFill>
-                  </a:tcPr>
-                </a:tc>
-                <a:tc>
-                  <a:txBody>
-                    <a:bodyPr/>
-                    <a:lstStyle/>
-                    <a:p>
-                      <a:pPr algn="r"/>
-                      <a:r>
-                        <a:rPr sz="1200" b="0">
-                          <a:solidFill>
-                            <a:srgbClr val="3C4947"/>
-                          </a:solidFill>
-                          <a:latin typeface="Consolas"/>
-                        </a:rPr>
-                        <a:t>1e-5</a:t>
-                      </a:r>
-                    </a:p>
-                  </a:txBody>
-                  <a:tcPr marL="82296" marR="82296" marT="27432" marB="27432" anchor="ctr">
-                    <a:solidFill>
-                      <a:srgbClr val="FFFFFF"/>
-                    </a:solidFill>
-                  </a:tcPr>
-                </a:tc>
-                <a:tc>
-                  <a:txBody>
-                    <a:bodyPr/>
-                    <a:lstStyle/>
-                    <a:p>
-                      <a:pPr algn="r"/>
-                      <a:r>
-                        <a:rPr sz="1200" b="0">
-                          <a:solidFill>
-                            <a:srgbClr val="3C4947"/>
-                          </a:solidFill>
-                          <a:latin typeface="Consolas"/>
-                        </a:rPr>
-                        <a:t>41.22</a:t>
-                      </a:r>
-                    </a:p>
-                  </a:txBody>
-                  <a:tcPr marL="82296" marR="82296" marT="27432" marB="27432" anchor="ctr">
-                    <a:solidFill>
-                      <a:srgbClr val="FFFFFF"/>
-                    </a:solidFill>
-                  </a:tcPr>
-                </a:tc>
-                <a:tc>
-                  <a:txBody>
-                    <a:bodyPr/>
-                    <a:lstStyle/>
-                    <a:p>
-                      <a:pPr algn="r"/>
-                      <a:r>
-                        <a:rPr sz="1200" b="0">
-                          <a:solidFill>
-                            <a:srgbClr val="3C4947"/>
-                          </a:solidFill>
-                          <a:latin typeface="Consolas"/>
-                        </a:rPr>
-                        <a:t>0.9838</a:t>
-                      </a:r>
-                    </a:p>
-                  </a:txBody>
-                  <a:tcPr marL="82296" marR="82296" marT="27432" marB="27432" anchor="ctr">
-                    <a:solidFill>
-                      <a:srgbClr val="FFFFFF"/>
-                    </a:solidFill>
-                  </a:tcPr>
-                </a:tc>
-              </a:tr>
-              <a:tr h="274320">
-                <a:tc>
-                  <a:txBody>
-                    <a:bodyPr/>
-                    <a:lstStyle/>
-                    <a:p>
-                      <a:pPr algn="l"/>
-                      <a:r>
-                        <a:rPr sz="1200" b="0">
-                          <a:solidFill>
-                            <a:srgbClr val="3C4947"/>
-                          </a:solidFill>
-                          <a:latin typeface="맑은 고딕"/>
-                        </a:rPr>
-                        <a:t>무시하고 0° 고정</a:t>
-                      </a:r>
-                    </a:p>
-                  </a:txBody>
-                  <a:tcPr marL="82296" marR="82296" marT="27432" marB="27432" anchor="ctr">
-                    <a:solidFill>
-                      <a:srgbClr val="FFFFFF"/>
-                    </a:solidFill>
-                  </a:tcPr>
-                </a:tc>
-                <a:tc>
-                  <a:txBody>
-                    <a:bodyPr/>
-                    <a:lstStyle/>
-                    <a:p>
-                      <a:pPr algn="r"/>
-                      <a:r>
-                        <a:rPr sz="1200" b="0">
-                          <a:solidFill>
-                            <a:srgbClr val="3C4947"/>
-                          </a:solidFill>
-                          <a:latin typeface="Consolas"/>
-                        </a:rPr>
-                        <a:t>1e-12</a:t>
-                      </a:r>
-                    </a:p>
-                  </a:txBody>
-                  <a:tcPr marL="82296" marR="82296" marT="27432" marB="27432" anchor="ctr">
-                    <a:solidFill>
-                      <a:srgbClr val="FFFFFF"/>
-                    </a:solidFill>
-                  </a:tcPr>
-                </a:tc>
-                <a:tc>
-                  <a:txBody>
-                    <a:bodyPr/>
-                    <a:lstStyle/>
-                    <a:p>
-                      <a:pPr algn="r"/>
-                      <a:r>
-                        <a:rPr sz="1200" b="0">
-                          <a:solidFill>
-                            <a:srgbClr val="3C4947"/>
-                          </a:solidFill>
-                          <a:latin typeface="Consolas"/>
-                        </a:rPr>
-                        <a:t>18.57</a:t>
-                      </a:r>
-                    </a:p>
-                  </a:txBody>
-                  <a:tcPr marL="82296" marR="82296" marT="27432" marB="27432" anchor="ctr">
-                    <a:solidFill>
-                      <a:srgbClr val="FFFFFF"/>
-                    </a:solidFill>
-                  </a:tcPr>
-                </a:tc>
-                <a:tc>
-                  <a:txBody>
-                    <a:bodyPr/>
-                    <a:lstStyle/>
-                    <a:p>
-                      <a:pPr algn="r"/>
-                      <a:r>
-                        <a:rPr sz="1200" b="0">
-                          <a:solidFill>
-                            <a:srgbClr val="3C4947"/>
-                          </a:solidFill>
-                          <a:latin typeface="Consolas"/>
-                        </a:rPr>
-                        <a:t>—</a:t>
-                      </a:r>
-                    </a:p>
-                  </a:txBody>
-                  <a:tcPr marL="82296" marR="82296" marT="27432" marB="27432" anchor="ctr">
-                    <a:solidFill>
-                      <a:srgbClr val="FFFFFF"/>
-                    </a:solidFill>
-                  </a:tcPr>
-                </a:tc>
-              </a:tr>
-            </a:tbl>
-          </a:graphicData>
-        </a:graphic>
-      </p:graphicFrame>
-      <p:sp>
-        <p:nvSpPr>
-          <p:cNvPr id="7" name="TextBox 6"/>
-          <p:cNvSpPr txBox="1"/>
-          <p:nvPr/>
-        </p:nvSpPr>
-        <p:spPr>
-          <a:xfrm>
-            <a:off x="7040880" y="2103120"/>
-            <a:ext cx="4480560" cy="1828800"/>
-          </a:xfrm>
-          <a:prstGeom prst="rect">
-            <a:avLst/>
-          </a:prstGeom>
-          <a:noFill/>
-        </p:spPr>
-        <p:txBody>
-          <a:bodyPr wrap="square" anchor="t">
-            <a:spAutoFit/>
-          </a:bodyPr>
-          <a:lstStyle/>
-          <a:p>
-            <a:pPr algn="l">
-              <a:lnSpc>
-                <a:spcPct val="125000"/>
-              </a:lnSpc>
-            </a:pPr>
-            <a:r>
-              <a:rPr sz="1400" b="1">
-                <a:solidFill>
-                  <a:srgbClr val="131A19"/>
-                </a:solidFill>
-                <a:latin typeface="맑은 고딕"/>
-              </a:rPr>
-              <a:t>방향은 측정치에서 알아낼 수 있다</a:t>
-            </a:r>
-          </a:p>
-          <a:p>
-            <a:pPr algn="l">
-              <a:lnSpc>
-                <a:spcPct val="125000"/>
-              </a:lnSpc>
-              <a:spcBef>
-                <a:spcPts val="600"/>
-              </a:spcBef>
-            </a:pPr>
-            <a:r>
-              <a:rPr sz="1200" b="0">
-                <a:solidFill>
-                  <a:srgbClr val="3C4947"/>
-                </a:solidFill>
-                <a:latin typeface="맑은 고딕"/>
-              </a:rPr>
-              <a:t>G = D·F 이므로 |D|≈0 인 magic-angle cone 에는 에너지가 없다. 스펙트럼에서 비어 있는 방향을 찾으면 된다. 메타데이터가 필요 없다.</a:t>
-            </a:r>
-          </a:p>
-        </p:txBody>
-      </p:sp>
-      <p:sp>
-        <p:nvSpPr>
-          <p:cNvPr id="8" name="Rounded Rectangle 7"/>
-          <p:cNvSpPr/>
-          <p:nvPr/>
-        </p:nvSpPr>
-        <p:spPr>
-          <a:xfrm>
-            <a:off x="640080" y="3749040"/>
-            <a:ext cx="10881360" cy="2194560"/>
-          </a:xfrm>
-          <a:prstGeom prst="roundRect">
-            <a:avLst>
-              <a:gd name="adj" fmla="val 4000"/>
-            </a:avLst>
-          </a:prstGeom>
-          <a:solidFill>
-            <a:srgbClr val="DCEDE8"/>
-          </a:solidFill>
-          <a:ln w="9525">
-            <a:solidFill>
-              <a:srgbClr val="0B6E5E"/>
-            </a:solidFill>
-          </a:ln>
-          <a:effectLst/>
-        </p:spPr>
-        <p:style>
-          <a:lnRef idx="1">
-            <a:schemeClr val="accent1"/>
-          </a:lnRef>
-          <a:fillRef idx="3">
-            <a:schemeClr val="accent1"/>
-          </a:fillRef>
-          <a:effectRef idx="2">
-            <a:schemeClr val="accent1"/>
-          </a:effectRef>
-          <a:fontRef idx="minor">
-            <a:schemeClr val="lt1"/>
-          </a:fontRef>
-        </p:style>
-        <p:txBody>
-          <a:bodyPr rtlCol="0" anchor="ctr"/>
-          <a:lstStyle/>
-          <a:p>
-            <a:pPr algn="ctr"/>
-          </a:p>
-        </p:txBody>
-      </p:sp>
-      <p:sp>
-        <p:nvSpPr>
-          <p:cNvPr id="9" name="TextBox 8"/>
-          <p:cNvSpPr txBox="1"/>
-          <p:nvPr/>
-        </p:nvSpPr>
-        <p:spPr>
-          <a:xfrm>
-            <a:off x="868680" y="3913632"/>
-            <a:ext cx="10424160" cy="1920240"/>
-          </a:xfrm>
-          <a:prstGeom prst="rect">
-            <a:avLst/>
-          </a:prstGeom>
-          <a:noFill/>
-        </p:spPr>
-        <p:txBody>
-          <a:bodyPr wrap="square" anchor="t">
-            <a:spAutoFit/>
-          </a:bodyPr>
-          <a:lstStyle/>
-          <a:p>
-            <a:pPr algn="l">
-              <a:lnSpc>
-                <a:spcPct val="125000"/>
-              </a:lnSpc>
-            </a:pPr>
-            <a:r>
-              <a:rPr sz="1500" b="1">
-                <a:solidFill>
-                  <a:srgbClr val="131A19"/>
-                </a:solidFill>
-                <a:latin typeface="맑은 고딕"/>
-              </a:rPr>
-              <a:t>K 는 모델이 현실과 어긋난 만큼을 흡수한다</a:t>
-            </a:r>
-          </a:p>
-          <a:p>
-            <a:pPr algn="l">
-              <a:lnSpc>
-                <a:spcPct val="125000"/>
-              </a:lnSpc>
-              <a:spcBef>
-                <a:spcPts val="600"/>
-              </a:spcBef>
-            </a:pPr>
-            <a:r>
-              <a:rPr sz="1250" b="0">
-                <a:solidFill>
-                  <a:srgbClr val="3C4947"/>
-                </a:solidFill>
-                <a:latin typeface="맑은 고딕"/>
-              </a:rPr>
-              <a:t>불확실성이 클수록 최적 K 가 커진다. 방향을 정확히 알면 1e-12, 추정하면 1e-5 다. 노이즈가 늘 때 K 가 커지는 것과 같은 구조다.</a:t>
-            </a:r>
-          </a:p>
-          <a:p>
-            <a:pPr algn="l">
-              <a:lnSpc>
-                <a:spcPct val="125000"/>
-              </a:lnSpc>
-              <a:spcBef>
-                <a:spcPts val="800"/>
-              </a:spcBef>
-            </a:pPr>
-            <a:r>
-              <a:rPr sz="1200" b="0">
-                <a:solidFill>
-                  <a:srgbClr val="3C4947"/>
-                </a:solidFill>
-                <a:latin typeface="Consolas"/>
-              </a:rPr>
-              <a:t>방향 오차에 대한 취약성:   0.01° 오차 → K=1e-12 는 107 dB 가 54 dB 로,  K=1e-6 은 54.7 → 54.1</a:t>
-            </a:r>
-          </a:p>
-          <a:p>
-            <a:pPr algn="l">
-              <a:lnSpc>
-                <a:spcPct val="125000"/>
-              </a:lnSpc>
-              <a:spcBef>
-                <a:spcPts val="600"/>
-              </a:spcBef>
-            </a:pPr>
-            <a:r>
-              <a:rPr sz="1250" b="0">
-                <a:solidFill>
-                  <a:srgbClr val="3C4947"/>
-                </a:solidFill>
-                <a:latin typeface="맑은 고딕"/>
-              </a:rPr>
-              <a:t>최소 K 가 항상 정답인 게 아니다. 방향을 무시하면 45°/90°/135° 에서 −11 ~ −13 dB 로 흐린 입력(7.89)보다도 나쁘다.</a:t>
-            </a:r>
-          </a:p>
-        </p:txBody>
-      </p:sp>
-    </p:spTree>
-  </p:cSld>
-  <p:clrMapOvr>
-    <a:masterClrMapping/>
-  </p:clrMapOvr>
-</p:sld>
-</file>
-
-<file path=ppt/slides/slide9.xml><?xml version="1.0" encoding="utf-8"?>
-<p:sld xmlns:a="http://schemas.openxmlformats.org/drawingml/2006/main" xmlns:p="http://schemas.openxmlformats.org/presentationml/2006/main" xmlns:r="http://schemas.openxmlformats.org/officeDocument/2006/relationships">
-  <p:cSld>
-    <p:bg>
-      <p:bgPr>
-        <a:solidFill>
-          <a:srgbClr val="FFFFFF"/>
-        </a:solidFill>
-        <a:effectLst/>
-      </p:bgPr>
-    </p:bg>
-    <p:spTree>
-      <p:nvGrpSpPr>
-        <p:cNvPr id="1" name=""/>
-        <p:cNvGrpSpPr/>
-        <p:nvPr/>
-      </p:nvGrpSpPr>
-      <p:grpSpPr/>
-      <p:sp>
-        <p:nvSpPr>
-          <p:cNvPr id="2" name="TextBox 1"/>
-          <p:cNvSpPr txBox="1"/>
-          <p:nvPr/>
-        </p:nvSpPr>
-        <p:spPr>
-          <a:xfrm>
-            <a:off x="640080" y="420624"/>
-            <a:ext cx="10972800" cy="274320"/>
-          </a:xfrm>
-          <a:prstGeom prst="rect">
-            <a:avLst/>
-          </a:prstGeom>
-          <a:noFill/>
-        </p:spPr>
-        <p:txBody>
-          <a:bodyPr wrap="square" anchor="t">
-            <a:spAutoFit/>
-          </a:bodyPr>
-          <a:lstStyle/>
-          <a:p>
-            <a:pPr algn="l">
-              <a:lnSpc>
-                <a:spcPct val="125000"/>
-              </a:lnSpc>
-            </a:pPr>
-            <a:r>
-              <a:rPr sz="1100" b="1">
-                <a:solidFill>
-                  <a:srgbClr val="0B6E5E"/>
-                </a:solidFill>
-                <a:latin typeface="Consolas"/>
-              </a:rPr>
-              <a:t>SUMMARY</a:t>
-            </a:r>
-          </a:p>
-        </p:txBody>
-      </p:sp>
-      <p:sp>
-        <p:nvSpPr>
-          <p:cNvPr id="3" name="TextBox 2"/>
-          <p:cNvSpPr txBox="1"/>
-          <p:nvPr/>
-        </p:nvSpPr>
-        <p:spPr>
-          <a:xfrm>
-            <a:off x="640080" y="713232"/>
-            <a:ext cx="10972800" cy="548640"/>
-          </a:xfrm>
-          <a:prstGeom prst="rect">
-            <a:avLst/>
-          </a:prstGeom>
-          <a:noFill/>
-        </p:spPr>
-        <p:txBody>
-          <a:bodyPr wrap="square" anchor="t">
-            <a:spAutoFit/>
-          </a:bodyPr>
-          <a:lstStyle/>
-          <a:p>
-            <a:pPr algn="l">
-              <a:lnSpc>
-                <a:spcPct val="125000"/>
-              </a:lnSpc>
-            </a:pPr>
-            <a:r>
-              <a:rPr sz="3000" b="1">
-                <a:solidFill>
-                  <a:srgbClr val="131A19"/>
-                </a:solidFill>
-                <a:latin typeface="맑은 고딕"/>
-              </a:rPr>
-              <a:t>정리</a:t>
-            </a:r>
-          </a:p>
-        </p:txBody>
-      </p:sp>
-      <p:sp>
-        <p:nvSpPr>
-          <p:cNvPr id="4" name="Rectangle 3"/>
-          <p:cNvSpPr/>
-          <p:nvPr/>
-        </p:nvSpPr>
-        <p:spPr>
-          <a:xfrm>
-            <a:off x="640080" y="1417320"/>
-            <a:ext cx="10908792" cy="15240"/>
-          </a:xfrm>
-          <a:prstGeom prst="rect">
-            <a:avLst/>
-          </a:prstGeom>
-          <a:solidFill>
-            <a:srgbClr val="DCE3E0"/>
-          </a:solidFill>
-          <a:ln>
-            <a:noFill/>
-          </a:ln>
-          <a:effectLst/>
-        </p:spPr>
-        <p:style>
-          <a:lnRef idx="1">
-            <a:schemeClr val="accent1"/>
-          </a:lnRef>
-          <a:fillRef idx="3">
-            <a:schemeClr val="accent1"/>
-          </a:fillRef>
-          <a:effectRef idx="2">
-            <a:schemeClr val="accent1"/>
-          </a:effectRef>
-          <a:fontRef idx="minor">
-            <a:schemeClr val="lt1"/>
-          </a:fontRef>
-        </p:style>
-        <p:txBody>
-          <a:bodyPr rtlCol="0" anchor="ctr"/>
-          <a:lstStyle/>
-          <a:p>
-            <a:pPr algn="ctr"/>
-          </a:p>
-        </p:txBody>
-      </p:sp>
-      <p:sp>
-        <p:nvSpPr>
-          <p:cNvPr id="5" name="Oval 4"/>
-          <p:cNvSpPr/>
-          <p:nvPr/>
-        </p:nvSpPr>
-        <p:spPr>
-          <a:xfrm>
-            <a:off x="685800" y="1810512"/>
-            <a:ext cx="310896" cy="310896"/>
-          </a:xfrm>
-          <a:prstGeom prst="ellipse">
-            <a:avLst/>
-          </a:prstGeom>
-          <a:solidFill>
-            <a:srgbClr val="0B6E5E"/>
-          </a:solidFill>
-          <a:ln>
-            <a:noFill/>
-          </a:ln>
-          <a:effectLst/>
-        </p:spPr>
-        <p:style>
-          <a:lnRef idx="1">
-            <a:schemeClr val="accent1"/>
-          </a:lnRef>
-          <a:fillRef idx="3">
-            <a:schemeClr val="accent1"/>
-          </a:fillRef>
-          <a:effectRef idx="2">
-            <a:schemeClr val="accent1"/>
-          </a:effectRef>
-          <a:fontRef idx="minor">
-            <a:schemeClr val="lt1"/>
-          </a:fontRef>
-        </p:style>
-        <p:txBody>
-          <a:bodyPr rtlCol="0" anchor="ctr"/>
-          <a:lstStyle/>
-          <a:p>
-            <a:pPr algn="ctr"/>
-            <a:r>
-              <a:rPr sz="1200" b="1">
-                <a:solidFill>
-                  <a:srgbClr val="FFFFFF"/>
-                </a:solidFill>
-                <a:latin typeface="Consolas"/>
-              </a:rPr>
-              <a:t>1</a:t>
-            </a:r>
-          </a:p>
-        </p:txBody>
-      </p:sp>
-      <p:sp>
-        <p:nvSpPr>
-          <p:cNvPr id="6" name="TextBox 5"/>
-          <p:cNvSpPr txBox="1"/>
-          <p:nvPr/>
-        </p:nvSpPr>
-        <p:spPr>
-          <a:xfrm>
-            <a:off x="1188720" y="1737360"/>
-            <a:ext cx="10241280" cy="822960"/>
-          </a:xfrm>
-          <a:prstGeom prst="rect">
-            <a:avLst/>
-          </a:prstGeom>
-          <a:noFill/>
-        </p:spPr>
-        <p:txBody>
-          <a:bodyPr wrap="square" anchor="t">
-            <a:spAutoFit/>
-          </a:bodyPr>
-          <a:lstStyle/>
-          <a:p>
-            <a:pPr algn="l">
-              <a:lnSpc>
-                <a:spcPct val="125000"/>
-              </a:lnSpc>
-            </a:pPr>
-            <a:r>
-              <a:rPr sz="1500" b="1">
-                <a:solidFill>
-                  <a:srgbClr val="131A19"/>
-                </a:solidFill>
-                <a:latin typeface="맑은 고딕"/>
-              </a:rPr>
-              <a:t>문제의 성격이 승자를 정한다</a:t>
-            </a:r>
-          </a:p>
-          <a:p>
-            <a:pPr algn="l">
-              <a:lnSpc>
-                <a:spcPct val="125000"/>
-              </a:lnSpc>
-              <a:spcBef>
-                <a:spcPts val="300"/>
-              </a:spcBef>
-            </a:pPr>
-            <a:r>
-              <a:rPr sz="1200" b="0">
-                <a:solidFill>
-                  <a:srgbClr val="66756F"/>
-                </a:solidFill>
-                <a:latin typeface="맑은 고딕"/>
-              </a:rPr>
-              <a:t>1일차는 노이즈라 역산이 불가능해 학습이 필요했고, 2일차는 노이즈가 없어 역산이 가능하니 학습이 불필요했다. 점수가 높은 건 잘해서가 아니라 문제가 쉬워서다.</a:t>
-            </a:r>
-          </a:p>
-        </p:txBody>
-      </p:sp>
-      <p:sp>
-        <p:nvSpPr>
-          <p:cNvPr id="7" name="Oval 6"/>
-          <p:cNvSpPr/>
-          <p:nvPr/>
-        </p:nvSpPr>
-        <p:spPr>
-          <a:xfrm>
-            <a:off x="685800" y="2743200"/>
-            <a:ext cx="310896" cy="310896"/>
-          </a:xfrm>
-          <a:prstGeom prst="ellipse">
-            <a:avLst/>
-          </a:prstGeom>
-          <a:solidFill>
-            <a:srgbClr val="0B6E5E"/>
-          </a:solidFill>
-          <a:ln>
-            <a:noFill/>
-          </a:ln>
-          <a:effectLst/>
-        </p:spPr>
-        <p:style>
-          <a:lnRef idx="1">
-            <a:schemeClr val="accent1"/>
-          </a:lnRef>
-          <a:fillRef idx="3">
-            <a:schemeClr val="accent1"/>
-          </a:fillRef>
-          <a:effectRef idx="2">
-            <a:schemeClr val="accent1"/>
-          </a:effectRef>
-          <a:fontRef idx="minor">
-            <a:schemeClr val="lt1"/>
-          </a:fontRef>
-        </p:style>
-        <p:txBody>
-          <a:bodyPr rtlCol="0" anchor="ctr"/>
-          <a:lstStyle/>
-          <a:p>
-            <a:pPr algn="ctr"/>
-            <a:r>
-              <a:rPr sz="1200" b="1">
-                <a:solidFill>
-                  <a:srgbClr val="FFFFFF"/>
-                </a:solidFill>
-                <a:latin typeface="Consolas"/>
-              </a:rPr>
-              <a:t>2</a:t>
-            </a:r>
-          </a:p>
-        </p:txBody>
-      </p:sp>
-      <p:sp>
-        <p:nvSpPr>
-          <p:cNvPr id="8" name="TextBox 7"/>
-          <p:cNvSpPr txBox="1"/>
-          <p:nvPr/>
-        </p:nvSpPr>
-        <p:spPr>
-          <a:xfrm>
-            <a:off x="1188720" y="2670048"/>
-            <a:ext cx="10241280" cy="822960"/>
-          </a:xfrm>
-          <a:prstGeom prst="rect">
-            <a:avLst/>
-          </a:prstGeom>
-          <a:noFill/>
-        </p:spPr>
-        <p:txBody>
-          <a:bodyPr wrap="square" anchor="t">
-            <a:spAutoFit/>
-          </a:bodyPr>
-          <a:lstStyle/>
-          <a:p>
-            <a:pPr algn="l">
-              <a:lnSpc>
-                <a:spcPct val="125000"/>
-              </a:lnSpc>
-            </a:pPr>
-            <a:r>
-              <a:rPr sz="1500" b="1">
-                <a:solidFill>
-                  <a:srgbClr val="131A19"/>
-                </a:solidFill>
-                <a:latin typeface="맑은 고딕"/>
-              </a:rPr>
-              <a:t>딥러닝이 진 이유는 수용영역이 아니라 조건수</a:t>
-            </a:r>
-          </a:p>
-          <a:p>
-            <a:pPr algn="l">
-              <a:lnSpc>
-                <a:spcPct val="125000"/>
-              </a:lnSpc>
-              <a:spcBef>
-                <a:spcPts val="300"/>
-              </a:spcBef>
-            </a:pPr>
-            <a:r>
-              <a:rPr sz="1200" b="0">
-                <a:solidFill>
-                  <a:srgbClr val="66756F"/>
-                </a:solidFill>
-                <a:latin typeface="맑은 고딕"/>
-              </a:rPr>
-              <a:t>배포 U-Net 은 4단 다운샘플이라 이미 전역을 본다. 문제는 |D| 가 작은 주파수를 1000배 넘게 증폭해야 한다는 것이고, 그 어려움이 구조와 손실 양쪽에 있다.</a:t>
-            </a:r>
-          </a:p>
-        </p:txBody>
-      </p:sp>
-      <p:sp>
-        <p:nvSpPr>
-          <p:cNvPr id="9" name="Oval 8"/>
-          <p:cNvSpPr/>
-          <p:nvPr/>
-        </p:nvSpPr>
-        <p:spPr>
-          <a:xfrm>
-            <a:off x="685800" y="3675888"/>
-            <a:ext cx="310896" cy="310896"/>
-          </a:xfrm>
-          <a:prstGeom prst="ellipse">
-            <a:avLst/>
-          </a:prstGeom>
-          <a:solidFill>
-            <a:srgbClr val="0B6E5E"/>
-          </a:solidFill>
-          <a:ln>
-            <a:noFill/>
-          </a:ln>
-          <a:effectLst/>
-        </p:spPr>
-        <p:style>
-          <a:lnRef idx="1">
-            <a:schemeClr val="accent1"/>
-          </a:lnRef>
-          <a:fillRef idx="3">
-            <a:schemeClr val="accent1"/>
-          </a:fillRef>
-          <a:effectRef idx="2">
-            <a:schemeClr val="accent1"/>
-          </a:effectRef>
-          <a:fontRef idx="minor">
-            <a:schemeClr val="lt1"/>
-          </a:fontRef>
-        </p:style>
-        <p:txBody>
-          <a:bodyPr rtlCol="0" anchor="ctr"/>
-          <a:lstStyle/>
-          <a:p>
-            <a:pPr algn="ctr"/>
-            <a:r>
-              <a:rPr sz="1200" b="1">
-                <a:solidFill>
-                  <a:srgbClr val="FFFFFF"/>
-                </a:solidFill>
-                <a:latin typeface="Consolas"/>
-              </a:rPr>
-              <a:t>3</a:t>
-            </a:r>
-          </a:p>
-        </p:txBody>
-      </p:sp>
-      <p:sp>
-        <p:nvSpPr>
-          <p:cNvPr id="10" name="TextBox 9"/>
-          <p:cNvSpPr txBox="1"/>
-          <p:nvPr/>
-        </p:nvSpPr>
-        <p:spPr>
-          <a:xfrm>
-            <a:off x="1188720" y="3602736"/>
-            <a:ext cx="10241280" cy="822960"/>
-          </a:xfrm>
-          <a:prstGeom prst="rect">
-            <a:avLst/>
-          </a:prstGeom>
-          <a:noFill/>
-        </p:spPr>
-        <p:txBody>
-          <a:bodyPr wrap="square" anchor="t">
-            <a:spAutoFit/>
-          </a:bodyPr>
-          <a:lstStyle/>
-          <a:p>
-            <a:pPr algn="l">
-              <a:lnSpc>
-                <a:spcPct val="125000"/>
-              </a:lnSpc>
-            </a:pPr>
-            <a:r>
-              <a:rPr sz="1500" b="1">
-                <a:solidFill>
-                  <a:srgbClr val="131A19"/>
-                </a:solidFill>
-                <a:latin typeface="맑은 고딕"/>
-              </a:rPr>
-              <a:t>고치면 이긴다 — 커널을 몰라도</a:t>
-            </a:r>
-          </a:p>
-          <a:p>
-            <a:pPr algn="l">
-              <a:lnSpc>
-                <a:spcPct val="125000"/>
-              </a:lnSpc>
-              <a:spcBef>
-                <a:spcPts val="300"/>
-              </a:spcBef>
-            </a:pPr>
-            <a:r>
-              <a:rPr sz="1200" b="0">
-                <a:solidFill>
-                  <a:srgbClr val="66756F"/>
-                </a:solidFill>
-                <a:latin typeface="맑은 고딕"/>
-              </a:rPr>
-              <a:t>주파수마다 최소제곱을 풀면 10장으로 107.9 dB, 200장으로 108.6 dB. 학습된 필터가 1/D 와 상관계수 1.000000. 같은 파라미터인데 최적화 방법만 바꿔 26.25 → 108.62.</a:t>
-            </a:r>
-          </a:p>
-        </p:txBody>
-      </p:sp>
-      <p:sp>
-        <p:nvSpPr>
-          <p:cNvPr id="11" name="Oval 10"/>
-          <p:cNvSpPr/>
-          <p:nvPr/>
-        </p:nvSpPr>
-        <p:spPr>
-          <a:xfrm>
-            <a:off x="685800" y="4608576"/>
-            <a:ext cx="310896" cy="310896"/>
-          </a:xfrm>
-          <a:prstGeom prst="ellipse">
-            <a:avLst/>
-          </a:prstGeom>
-          <a:solidFill>
-            <a:srgbClr val="0B6E5E"/>
-          </a:solidFill>
-          <a:ln>
-            <a:noFill/>
-          </a:ln>
-          <a:effectLst/>
-        </p:spPr>
-        <p:style>
-          <a:lnRef idx="1">
-            <a:schemeClr val="accent1"/>
-          </a:lnRef>
-          <a:fillRef idx="3">
-            <a:schemeClr val="accent1"/>
-          </a:fillRef>
-          <a:effectRef idx="2">
-            <a:schemeClr val="accent1"/>
-          </a:effectRef>
-          <a:fontRef idx="minor">
-            <a:schemeClr val="lt1"/>
-          </a:fontRef>
-        </p:style>
-        <p:txBody>
-          <a:bodyPr rtlCol="0" anchor="ctr"/>
-          <a:lstStyle/>
-          <a:p>
-            <a:pPr algn="ctr"/>
-            <a:r>
-              <a:rPr sz="1200" b="1">
-                <a:solidFill>
-                  <a:srgbClr val="FFFFFF"/>
-                </a:solidFill>
-                <a:latin typeface="Consolas"/>
-              </a:rPr>
-              <a:t>4</a:t>
-            </a:r>
-          </a:p>
-        </p:txBody>
-      </p:sp>
-      <p:sp>
-        <p:nvSpPr>
-          <p:cNvPr id="12" name="TextBox 11"/>
-          <p:cNvSpPr txBox="1"/>
-          <p:nvPr/>
-        </p:nvSpPr>
-        <p:spPr>
-          <a:xfrm>
-            <a:off x="1188720" y="4535424"/>
-            <a:ext cx="10241280" cy="822960"/>
-          </a:xfrm>
-          <a:prstGeom prst="rect">
-            <a:avLst/>
-          </a:prstGeom>
-          <a:noFill/>
-        </p:spPr>
-        <p:txBody>
-          <a:bodyPr wrap="square" anchor="t">
-            <a:spAutoFit/>
-          </a:bodyPr>
-          <a:lstStyle/>
-          <a:p>
-            <a:pPr algn="l">
-              <a:lnSpc>
-                <a:spcPct val="125000"/>
-              </a:lnSpc>
-            </a:pPr>
-            <a:r>
-              <a:rPr sz="1500" b="1">
-                <a:solidFill>
-                  <a:srgbClr val="131A19"/>
-                </a:solidFill>
-                <a:latin typeface="맑은 고딕"/>
-              </a:rPr>
-              <a:t>K 는 모델 오차를 흡수하는 손잡이</a:t>
-            </a:r>
-          </a:p>
-          <a:p>
-            <a:pPr algn="l">
-              <a:lnSpc>
-                <a:spcPct val="125000"/>
-              </a:lnSpc>
-              <a:spcBef>
-                <a:spcPts val="300"/>
-              </a:spcBef>
-            </a:pPr>
-            <a:r>
-              <a:rPr sz="1200" b="0">
-                <a:solidFill>
-                  <a:srgbClr val="66756F"/>
-                </a:solidFill>
-                <a:latin typeface="맑은 고딕"/>
-              </a:rPr>
-              <a:t>잡음이든 커널 방향 오차든 같은 자리로 들어간다. 노이즈가 있으면 학습된 필터가 자동으로 Wiener 가 되고, 주파수마다 다른 K 를 갖기 때문에 손으로 튜닝한 스칼라 K 를 이긴다.</a:t>
-            </a:r>
-          </a:p>
-        </p:txBody>
-      </p:sp>
-      <p:sp>
-        <p:nvSpPr>
-          <p:cNvPr id="13" name="Oval 12"/>
-          <p:cNvSpPr/>
-          <p:nvPr/>
-        </p:nvSpPr>
-        <p:spPr>
-          <a:xfrm>
-            <a:off x="685800" y="5541264"/>
-            <a:ext cx="310896" cy="310896"/>
-          </a:xfrm>
-          <a:prstGeom prst="ellipse">
-            <a:avLst/>
-          </a:prstGeom>
-          <a:solidFill>
-            <a:srgbClr val="0B6E5E"/>
-          </a:solidFill>
-          <a:ln>
-            <a:noFill/>
-          </a:ln>
-          <a:effectLst/>
-        </p:spPr>
-        <p:style>
-          <a:lnRef idx="1">
-            <a:schemeClr val="accent1"/>
-          </a:lnRef>
-          <a:fillRef idx="3">
-            <a:schemeClr val="accent1"/>
-          </a:fillRef>
-          <a:effectRef idx="2">
-            <a:schemeClr val="accent1"/>
-          </a:effectRef>
-          <a:fontRef idx="minor">
-            <a:schemeClr val="lt1"/>
-          </a:fontRef>
-        </p:style>
-        <p:txBody>
-          <a:bodyPr rtlCol="0" anchor="ctr"/>
-          <a:lstStyle/>
-          <a:p>
-            <a:pPr algn="ctr"/>
-            <a:r>
-              <a:rPr sz="1200" b="1">
-                <a:solidFill>
-                  <a:srgbClr val="FFFFFF"/>
-                </a:solidFill>
-                <a:latin typeface="Consolas"/>
-              </a:rPr>
-              <a:t>5</a:t>
-            </a:r>
-          </a:p>
-        </p:txBody>
-      </p:sp>
-      <p:sp>
-        <p:nvSpPr>
-          <p:cNvPr id="14" name="TextBox 13"/>
-          <p:cNvSpPr txBox="1"/>
-          <p:nvPr/>
-        </p:nvSpPr>
-        <p:spPr>
-          <a:xfrm>
-            <a:off x="1188720" y="5468112"/>
-            <a:ext cx="10241280" cy="822960"/>
-          </a:xfrm>
-          <a:prstGeom prst="rect">
-            <a:avLst/>
-          </a:prstGeom>
-          <a:noFill/>
-        </p:spPr>
-        <p:txBody>
-          <a:bodyPr wrap="square" anchor="t">
-            <a:spAutoFit/>
-          </a:bodyPr>
-          <a:lstStyle/>
-          <a:p>
-            <a:pPr algn="l">
-              <a:lnSpc>
-                <a:spcPct val="125000"/>
-              </a:lnSpc>
-            </a:pPr>
-            <a:r>
-              <a:rPr sz="1500" b="1">
-                <a:solidFill>
-                  <a:srgbClr val="131A19"/>
-                </a:solidFill>
-                <a:latin typeface="맑은 고딕"/>
-              </a:rPr>
-              <a:t>그리고 이 답은 종잇장이다</a:t>
-            </a:r>
-          </a:p>
-          <a:p>
-            <a:pPr algn="l">
-              <a:lnSpc>
-                <a:spcPct val="125000"/>
-              </a:lnSpc>
-              <a:spcBef>
-                <a:spcPts val="300"/>
-              </a:spcBef>
-            </a:pPr>
-            <a:r>
-              <a:rPr sz="1200" b="0">
-                <a:solidFill>
-                  <a:srgbClr val="66756F"/>
-                </a:solidFill>
-                <a:latin typeface="맑은 고딕"/>
-              </a:rPr>
-              <a:t>σ=1e-3 노이즈면 109.9 dB 가 7.9 dB 로 무너진다. 3일차는 g = h*f + n 이고, 그때 비로소 학습이 다시 필요해진다.</a:t>
-            </a:r>
-          </a:p>
-        </p:txBody>
-      </p:sp>
-      <p:sp>
-        <p:nvSpPr>
-          <p:cNvPr id="15" name="TextBox 14"/>
-          <p:cNvSpPr txBox="1"/>
-          <p:nvPr/>
-        </p:nvSpPr>
-        <p:spPr>
-          <a:xfrm>
-            <a:off x="640080" y="6355080"/>
-            <a:ext cx="10972800" cy="274320"/>
-          </a:xfrm>
-          <a:prstGeom prst="rect">
-            <a:avLst/>
-          </a:prstGeom>
-          <a:noFill/>
-        </p:spPr>
-        <p:txBody>
-          <a:bodyPr wrap="square" anchor="t">
-            <a:spAutoFit/>
-          </a:bodyPr>
-          <a:lstStyle/>
-          <a:p>
-            <a:pPr algn="l">
-              <a:lnSpc>
-                <a:spcPct val="125000"/>
-              </a:lnSpc>
-            </a:pPr>
-            <a:r>
-              <a:rPr sz="1000" b="0">
-                <a:solidFill>
-                  <a:srgbClr val="66756F"/>
-                </a:solidFill>
-                <a:latin typeface="Consolas"/>
-              </a:rPr>
-              <a:t>제출값  PSNR 109.86   SSIM 1.0000   (배포 U-Net 25.59 대비 +84.27 dB)</a:t>
             </a:r>
           </a:p>
         </p:txBody>
